--- a/make_presentation/templates/templates/flow/no_logo_6.pptx
+++ b/make_presentation/templates/templates/flow/no_logo_6.pptx
@@ -65,20 +65,17 @@
             <a:noAutofit/>
           </a:bodyPr>
           <a:p>
-            <a:r>
-              <a:rPr b="0" lang="en-US" sz="1800" spc="-1" strike="noStrike">
-                <a:solidFill>
-                  <a:srgbClr val="000000"/>
-                </a:solidFill>
-                <a:latin typeface="Calibri"/>
-              </a:rPr>
-              <a:t>Для перемещения страницы щёлкните мышью</a:t>
-            </a:r>
-            <a:endParaRPr b="0" lang="en-US" sz="1800" spc="-1" strike="noStrike">
-              <a:solidFill>
-                <a:srgbClr val="000000"/>
-              </a:solidFill>
-              <a:latin typeface="Calibri"/>
+            <a:pPr algn="ctr">
+              <a:buNone/>
+            </a:pPr>
+            <a:r>
+              <a:rPr b="0" lang="en-US" sz="4400" spc="-1" strike="noStrike">
+                <a:latin typeface="Arial"/>
+              </a:rPr>
+              <a:t>Click to move the slide</a:t>
+            </a:r>
+            <a:endParaRPr b="0" lang="en-US" sz="4400" spc="-1" strike="noStrike">
+              <a:latin typeface="Arial"/>
             </a:endParaRPr>
           </a:p>
         </p:txBody>
@@ -112,12 +109,12 @@
           </a:bodyPr>
           <a:p>
             <a:r>
-              <a:rPr b="0" lang="ru-RU" sz="2000" spc="-1" strike="noStrike">
+              <a:rPr b="0" lang="en-US" sz="2000" spc="-1" strike="noStrike">
                 <a:latin typeface="Arial"/>
               </a:rPr>
-              <a:t>Для правки формата примечаний щёлкните мышью</a:t>
-            </a:r>
-            <a:endParaRPr b="0" lang="ru-RU" sz="2000" spc="-1" strike="noStrike">
+              <a:t>Click to edit the notes format</a:t>
+            </a:r>
+            <a:endParaRPr b="0" lang="en-US" sz="2000" spc="-1" strike="noStrike">
               <a:latin typeface="Arial"/>
             </a:endParaRPr>
           </a:p>
@@ -152,12 +149,12 @@
           </a:bodyPr>
           <a:p>
             <a:r>
-              <a:rPr b="0" lang="ru-RU" sz="1400" spc="-1" strike="noStrike">
+              <a:rPr b="0" lang="en-US" sz="1400" spc="-1" strike="noStrike">
                 <a:latin typeface="Times New Roman"/>
               </a:rPr>
-              <a:t>&lt;верхний колонтитул&gt;</a:t>
-            </a:r>
-            <a:endParaRPr b="0" lang="ru-RU" sz="1400" spc="-1" strike="noStrike">
+              <a:t>&lt;header&gt;</a:t>
+            </a:r>
+            <a:endParaRPr b="0" lang="en-US" sz="1400" spc="-1" strike="noStrike">
               <a:latin typeface="Times New Roman"/>
             </a:endParaRPr>
           </a:p>
@@ -193,7 +190,7 @@
           <a:lstStyle>
             <a:lvl1pPr algn="r">
               <a:buNone/>
-              <a:defRPr b="0" lang="ru-RU" sz="1400" spc="-1" strike="noStrike">
+              <a:defRPr b="0" lang="en-US" sz="1400" spc="-1" strike="noStrike">
                 <a:latin typeface="Times New Roman"/>
               </a:defRPr>
             </a:lvl1pPr>
@@ -203,12 +200,12 @@
               <a:buNone/>
             </a:pPr>
             <a:r>
-              <a:rPr b="0" lang="ru-RU" sz="1400" spc="-1" strike="noStrike">
+              <a:rPr b="0" lang="en-US" sz="1400" spc="-1" strike="noStrike">
                 <a:latin typeface="Times New Roman"/>
               </a:rPr>
-              <a:t>&lt;дата/время&gt;</a:t>
-            </a:r>
-            <a:endParaRPr b="0" lang="ru-RU" sz="1400" spc="-1" strike="noStrike">
+              <a:t>&lt;date/time&gt;</a:t>
+            </a:r>
+            <a:endParaRPr b="0" lang="en-US" sz="1400" spc="-1" strike="noStrike">
               <a:latin typeface="Times New Roman"/>
             </a:endParaRPr>
           </a:p>
@@ -243,19 +240,19 @@
           </a:bodyPr>
           <a:lstStyle>
             <a:lvl1pPr>
-              <a:defRPr b="0" lang="ru-RU" sz="1400" spc="-1" strike="noStrike">
+              <a:defRPr b="0" lang="en-US" sz="1400" spc="-1" strike="noStrike">
                 <a:latin typeface="Times New Roman"/>
               </a:defRPr>
             </a:lvl1pPr>
           </a:lstStyle>
           <a:p>
             <a:r>
-              <a:rPr b="0" lang="ru-RU" sz="1400" spc="-1" strike="noStrike">
+              <a:rPr b="0" lang="en-US" sz="1400" spc="-1" strike="noStrike">
                 <a:latin typeface="Times New Roman"/>
               </a:rPr>
-              <a:t>&lt;нижний колонтитул&gt;</a:t>
-            </a:r>
-            <a:endParaRPr b="0" lang="ru-RU" sz="1400" spc="-1" strike="noStrike">
+              <a:t>&lt;footer&gt;</a:t>
+            </a:r>
+            <a:endParaRPr b="0" lang="en-US" sz="1400" spc="-1" strike="noStrike">
               <a:latin typeface="Times New Roman"/>
             </a:endParaRPr>
           </a:p>
@@ -291,7 +288,7 @@
           <a:lstStyle>
             <a:lvl1pPr algn="r">
               <a:buNone/>
-              <a:defRPr b="0" lang="ru-RU" sz="1400" spc="-1" strike="noStrike">
+              <a:defRPr b="0" lang="en-US" sz="1400" spc="-1" strike="noStrike">
                 <a:latin typeface="Times New Roman"/>
               </a:defRPr>
             </a:lvl1pPr>
@@ -300,13 +297,13 @@
             <a:pPr algn="r">
               <a:buNone/>
             </a:pPr>
-            <a:fld id="{DC9B779B-91B3-41AF-B0C4-940A52D44FC8}" type="slidenum">
-              <a:rPr b="0" lang="ru-RU" sz="1400" spc="-1" strike="noStrike">
+            <a:fld id="{39C52008-E4EA-4F14-893F-EB8BA3E52ED1}" type="slidenum">
+              <a:rPr b="0" lang="en-US" sz="1400" spc="-1" strike="noStrike">
                 <a:latin typeface="Times New Roman"/>
               </a:rPr>
-              <a:t>&lt;номер&gt;</a:t>
+              <a:t>&lt;number&gt;</a:t>
             </a:fld>
-            <a:endParaRPr b="0" lang="ru-RU" sz="1400" spc="-1" strike="noStrike">
+            <a:endParaRPr b="0" lang="en-US" sz="1400" spc="-1" strike="noStrike">
               <a:latin typeface="Times New Roman"/>
             </a:endParaRPr>
           </a:p>
@@ -337,7 +334,7 @@
       </p:grpSpPr>
       <p:sp>
         <p:nvSpPr>
-          <p:cNvPr id="96" name="PlaceHolder 1"/>
+          <p:cNvPr id="95" name="PlaceHolder 1"/>
           <p:cNvSpPr>
             <a:spLocks noGrp="1"/>
           </p:cNvSpPr>
@@ -348,19 +345,19 @@
         <p:spPr>
           <a:xfrm>
             <a:off x="685800" y="1143000"/>
-            <a:ext cx="5486040" cy="3085920"/>
-          </a:xfrm>
-          <a:prstGeom prst="rect">
-            <a:avLst/>
-          </a:prstGeom>
-          <a:ln w="0">
-            <a:noFill/>
-          </a:ln>
-        </p:spPr>
-      </p:sp>
-      <p:sp>
-        <p:nvSpPr>
-          <p:cNvPr id="97" name="PlaceHolder 2"/>
+            <a:ext cx="5485680" cy="3085560"/>
+          </a:xfrm>
+          <a:prstGeom prst="rect">
+            <a:avLst/>
+          </a:prstGeom>
+          <a:ln w="0">
+            <a:noFill/>
+          </a:ln>
+        </p:spPr>
+      </p:sp>
+      <p:sp>
+        <p:nvSpPr>
+          <p:cNvPr id="96" name="PlaceHolder 2"/>
           <p:cNvSpPr>
             <a:spLocks noGrp="1"/>
           </p:cNvSpPr>
@@ -371,30 +368,30 @@
         <p:spPr>
           <a:xfrm>
             <a:off x="685800" y="4400640"/>
-            <a:ext cx="5486040" cy="3600000"/>
-          </a:xfrm>
-          <a:prstGeom prst="rect">
-            <a:avLst/>
-          </a:prstGeom>
-          <a:noFill/>
-          <a:ln w="0">
-            <a:noFill/>
-          </a:ln>
-        </p:spPr>
-        <p:txBody>
-          <a:bodyPr anchor="t">
+            <a:ext cx="5485680" cy="3599640"/>
+          </a:xfrm>
+          <a:prstGeom prst="rect">
+            <a:avLst/>
+          </a:prstGeom>
+          <a:noFill/>
+          <a:ln w="0">
+            <a:noFill/>
+          </a:ln>
+        </p:spPr>
+        <p:txBody>
+          <a:bodyPr lIns="0" rIns="0" tIns="0" bIns="0" anchor="t">
             <a:noAutofit/>
           </a:bodyPr>
           <a:p>
-            <a:endParaRPr b="0" lang="ru-RU" sz="2000" spc="-1" strike="noStrike">
-              <a:latin typeface="Arial"/>
-            </a:endParaRPr>
-          </a:p>
-        </p:txBody>
-      </p:sp>
-      <p:sp>
-        <p:nvSpPr>
-          <p:cNvPr id="98" name="PlaceHolder 3"/>
+            <a:endParaRPr b="0" lang="en-US" sz="2000" spc="-1" strike="noStrike">
+              <a:latin typeface="Arial"/>
+            </a:endParaRPr>
+          </a:p>
+        </p:txBody>
+      </p:sp>
+      <p:sp>
+        <p:nvSpPr>
+          <p:cNvPr id="97" name="PlaceHolder 3"/>
           <p:cNvSpPr>
             <a:spLocks noGrp="1"/>
           </p:cNvSpPr>
@@ -405,18 +402,18 @@
         <p:spPr>
           <a:xfrm>
             <a:off x="3884760" y="8685360"/>
-            <a:ext cx="2971440" cy="458280"/>
-          </a:xfrm>
-          <a:prstGeom prst="rect">
-            <a:avLst/>
-          </a:prstGeom>
-          <a:noFill/>
-          <a:ln w="0">
-            <a:noFill/>
-          </a:ln>
-        </p:spPr>
-        <p:txBody>
-          <a:bodyPr anchor="b">
+            <a:ext cx="2971080" cy="457920"/>
+          </a:xfrm>
+          <a:prstGeom prst="rect">
+            <a:avLst/>
+          </a:prstGeom>
+          <a:noFill/>
+          <a:ln w="0">
+            <a:noFill/>
+          </a:ln>
+        </p:spPr>
+        <p:txBody>
+          <a:bodyPr lIns="0" rIns="0" tIns="0" bIns="0" anchor="b">
             <a:noAutofit/>
           </a:bodyPr>
           <a:lstStyle>
@@ -437,13 +434,13 @@
               </a:lnSpc>
               <a:buNone/>
             </a:pPr>
-            <a:fld id="{E9659C6D-F664-4418-B5BC-FEC327EA64BC}" type="slidenum">
+            <a:fld id="{0CD5FCE5-EA38-41CB-B71D-E90DC2104CA9}" type="slidenum">
               <a:rPr b="0" lang="ru-RU" sz="1200" spc="-1" strike="noStrike">
                 <a:latin typeface="Times New Roman"/>
               </a:rPr>
-              <a:t>&lt;номер&gt;</a:t>
+              <a:t>&lt;number&gt;</a:t>
             </a:fld>
-            <a:endParaRPr b="0" lang="ru-RU" sz="1200" spc="-1" strike="noStrike">
+            <a:endParaRPr b="0" lang="en-US" sz="1200" spc="-1" strike="noStrike">
               <a:latin typeface="Times New Roman"/>
             </a:endParaRPr>
           </a:p>
@@ -473,7 +470,7 @@
       </p:grpSpPr>
       <p:sp>
         <p:nvSpPr>
-          <p:cNvPr id="99" name="PlaceHolder 1"/>
+          <p:cNvPr id="98" name="PlaceHolder 1"/>
           <p:cNvSpPr>
             <a:spLocks noGrp="1"/>
           </p:cNvSpPr>
@@ -484,19 +481,19 @@
         <p:spPr>
           <a:xfrm>
             <a:off x="685800" y="1143000"/>
-            <a:ext cx="5486040" cy="3085920"/>
-          </a:xfrm>
-          <a:prstGeom prst="rect">
-            <a:avLst/>
-          </a:prstGeom>
-          <a:ln w="0">
-            <a:noFill/>
-          </a:ln>
-        </p:spPr>
-      </p:sp>
-      <p:sp>
-        <p:nvSpPr>
-          <p:cNvPr id="100" name="PlaceHolder 2"/>
+            <a:ext cx="5485680" cy="3085560"/>
+          </a:xfrm>
+          <a:prstGeom prst="rect">
+            <a:avLst/>
+          </a:prstGeom>
+          <a:ln w="0">
+            <a:noFill/>
+          </a:ln>
+        </p:spPr>
+      </p:sp>
+      <p:sp>
+        <p:nvSpPr>
+          <p:cNvPr id="99" name="PlaceHolder 2"/>
           <p:cNvSpPr>
             <a:spLocks noGrp="1"/>
           </p:cNvSpPr>
@@ -507,30 +504,30 @@
         <p:spPr>
           <a:xfrm>
             <a:off x="685800" y="4400640"/>
-            <a:ext cx="5486040" cy="3600000"/>
-          </a:xfrm>
-          <a:prstGeom prst="rect">
-            <a:avLst/>
-          </a:prstGeom>
-          <a:noFill/>
-          <a:ln w="0">
-            <a:noFill/>
-          </a:ln>
-        </p:spPr>
-        <p:txBody>
-          <a:bodyPr anchor="t">
+            <a:ext cx="5485680" cy="3599640"/>
+          </a:xfrm>
+          <a:prstGeom prst="rect">
+            <a:avLst/>
+          </a:prstGeom>
+          <a:noFill/>
+          <a:ln w="0">
+            <a:noFill/>
+          </a:ln>
+        </p:spPr>
+        <p:txBody>
+          <a:bodyPr lIns="0" rIns="0" tIns="0" bIns="0" anchor="t">
             <a:noAutofit/>
           </a:bodyPr>
           <a:p>
-            <a:endParaRPr b="0" lang="ru-RU" sz="2000" spc="-1" strike="noStrike">
-              <a:latin typeface="Arial"/>
-            </a:endParaRPr>
-          </a:p>
-        </p:txBody>
-      </p:sp>
-      <p:sp>
-        <p:nvSpPr>
-          <p:cNvPr id="101" name="PlaceHolder 3"/>
+            <a:endParaRPr b="0" lang="en-US" sz="2000" spc="-1" strike="noStrike">
+              <a:latin typeface="Arial"/>
+            </a:endParaRPr>
+          </a:p>
+        </p:txBody>
+      </p:sp>
+      <p:sp>
+        <p:nvSpPr>
+          <p:cNvPr id="100" name="PlaceHolder 3"/>
           <p:cNvSpPr>
             <a:spLocks noGrp="1"/>
           </p:cNvSpPr>
@@ -541,18 +538,18 @@
         <p:spPr>
           <a:xfrm>
             <a:off x="3884760" y="8685360"/>
-            <a:ext cx="2971440" cy="458280"/>
-          </a:xfrm>
-          <a:prstGeom prst="rect">
-            <a:avLst/>
-          </a:prstGeom>
-          <a:noFill/>
-          <a:ln w="0">
-            <a:noFill/>
-          </a:ln>
-        </p:spPr>
-        <p:txBody>
-          <a:bodyPr anchor="b">
+            <a:ext cx="2971080" cy="457920"/>
+          </a:xfrm>
+          <a:prstGeom prst="rect">
+            <a:avLst/>
+          </a:prstGeom>
+          <a:noFill/>
+          <a:ln w="0">
+            <a:noFill/>
+          </a:ln>
+        </p:spPr>
+        <p:txBody>
+          <a:bodyPr lIns="0" rIns="0" tIns="0" bIns="0" anchor="b">
             <a:noAutofit/>
           </a:bodyPr>
           <a:lstStyle>
@@ -573,13 +570,13 @@
               </a:lnSpc>
               <a:buNone/>
             </a:pPr>
-            <a:fld id="{47D0D633-4BE6-4D64-B377-DF61396A629A}" type="slidenum">
+            <a:fld id="{88E3A38E-7324-4E57-AA58-49FB144C6B3E}" type="slidenum">
               <a:rPr b="0" lang="ru-RU" sz="1200" spc="-1" strike="noStrike">
                 <a:latin typeface="Times New Roman"/>
               </a:rPr>
-              <a:t>&lt;номер&gt;</a:t>
+              <a:t>&lt;number&gt;</a:t>
             </a:fld>
-            <a:endParaRPr b="0" lang="ru-RU" sz="1200" spc="-1" strike="noStrike">
+            <a:endParaRPr b="0" lang="en-US" sz="1200" spc="-1" strike="noStrike">
               <a:latin typeface="Times New Roman"/>
             </a:endParaRPr>
           </a:p>
@@ -614,7 +611,7 @@
             <a:spLocks noGrp="1"/>
           </p:cNvSpPr>
           <p:nvPr>
-            <p:ph type="ftr" idx="2"/>
+            <p:ph type="ftr" idx="1"/>
           </p:nvPr>
         </p:nvSpPr>
         <p:spPr/>
@@ -634,14 +631,14 @@
             <a:spLocks noGrp="1"/>
           </p:cNvSpPr>
           <p:nvPr>
-            <p:ph type="sldNum" idx="3"/>
+            <p:ph type="sldNum" idx="2"/>
           </p:nvPr>
         </p:nvSpPr>
         <p:spPr/>
         <p:txBody>
           <a:bodyPr/>
           <a:p>
-            <a:fld id="{853DA462-A47E-4DAC-A2FA-8218D92AE192}" type="slidenum">
+            <a:fld id="{AF900FB6-BFB3-45E7-BDD6-BD6642914D39}" type="slidenum">
               <a:t>&lt;#&gt;</a:t>
             </a:fld>
           </a:p>
@@ -654,7 +651,7 @@
             <a:spLocks noGrp="1"/>
           </p:cNvSpPr>
           <p:nvPr>
-            <p:ph type="dt" idx="1"/>
+            <p:ph type="dt" idx="3"/>
           </p:nvPr>
         </p:nvSpPr>
         <p:spPr/>
@@ -662,7 +659,7 @@
           <a:bodyPr/>
           <a:p>
             <a:r>
-              <a:rPr lang="ru-RU"/>
+              <a:rPr lang="en-US"/>
               <a:t/>
             </a:r>
           </a:p>
@@ -703,7 +700,7 @@
         <p:spPr>
           <a:xfrm>
             <a:off x="1143000" y="841680"/>
-            <a:ext cx="6857640" cy="1790280"/>
+            <a:ext cx="6857280" cy="1789920"/>
           </a:xfrm>
           <a:prstGeom prst="rect">
             <a:avLst/>
@@ -718,11 +715,11 @@
             <a:noAutofit/>
           </a:bodyPr>
           <a:p>
-            <a:endParaRPr b="0" lang="en-US" sz="1800" spc="-1" strike="noStrike">
-              <a:solidFill>
-                <a:srgbClr val="000000"/>
-              </a:solidFill>
-              <a:latin typeface="Calibri"/>
+            <a:pPr algn="ctr">
+              <a:buNone/>
+            </a:pPr>
+            <a:endParaRPr b="0" lang="en-US" sz="4400" spc="-1" strike="noStrike">
+              <a:latin typeface="Arial"/>
             </a:endParaRPr>
           </a:p>
         </p:txBody>
@@ -755,20 +752,8 @@
             <a:normAutofit/>
           </a:bodyPr>
           <a:p>
-            <a:pPr>
-              <a:lnSpc>
-                <a:spcPct val="90000"/>
-              </a:lnSpc>
-              <a:spcBef>
-                <a:spcPts val="1417"/>
-              </a:spcBef>
-              <a:buNone/>
-            </a:pPr>
-            <a:endParaRPr b="0" lang="en-US" sz="2100" spc="-1" strike="noStrike">
-              <a:solidFill>
-                <a:srgbClr val="000000"/>
-              </a:solidFill>
-              <a:latin typeface="Calibri"/>
+            <a:endParaRPr b="0" lang="en-US" sz="3200" spc="-1" strike="noStrike">
+              <a:latin typeface="Arial"/>
             </a:endParaRPr>
           </a:p>
         </p:txBody>
@@ -801,20 +786,8 @@
             <a:normAutofit/>
           </a:bodyPr>
           <a:p>
-            <a:pPr>
-              <a:lnSpc>
-                <a:spcPct val="90000"/>
-              </a:lnSpc>
-              <a:spcBef>
-                <a:spcPts val="1417"/>
-              </a:spcBef>
-              <a:buNone/>
-            </a:pPr>
-            <a:endParaRPr b="0" lang="en-US" sz="2100" spc="-1" strike="noStrike">
-              <a:solidFill>
-                <a:srgbClr val="000000"/>
-              </a:solidFill>
-              <a:latin typeface="Calibri"/>
+            <a:endParaRPr b="0" lang="en-US" sz="3200" spc="-1" strike="noStrike">
+              <a:latin typeface="Arial"/>
             </a:endParaRPr>
           </a:p>
         </p:txBody>
@@ -826,7 +799,7 @@
             <a:spLocks noGrp="1"/>
           </p:cNvSpPr>
           <p:nvPr>
-            <p:ph type="ftr" idx="2"/>
+            <p:ph type="ftr" idx="1"/>
           </p:nvPr>
         </p:nvSpPr>
         <p:spPr/>
@@ -846,14 +819,14 @@
             <a:spLocks noGrp="1"/>
           </p:cNvSpPr>
           <p:nvPr>
-            <p:ph type="sldNum" idx="3"/>
+            <p:ph type="sldNum" idx="2"/>
           </p:nvPr>
         </p:nvSpPr>
         <p:spPr/>
         <p:txBody>
           <a:bodyPr/>
           <a:p>
-            <a:fld id="{8A04814E-55A2-4D29-A604-2273BA819C88}" type="slidenum">
+            <a:fld id="{34BC3E58-A02F-43EA-A722-5887A2F280CA}" type="slidenum">
               <a:t>&lt;#&gt;</a:t>
             </a:fld>
           </a:p>
@@ -866,7 +839,7 @@
             <a:spLocks noGrp="1"/>
           </p:cNvSpPr>
           <p:nvPr>
-            <p:ph type="dt" idx="1"/>
+            <p:ph type="dt" idx="3"/>
           </p:nvPr>
         </p:nvSpPr>
         <p:spPr/>
@@ -874,7 +847,7 @@
           <a:bodyPr/>
           <a:p>
             <a:r>
-              <a:rPr lang="ru-RU"/>
+              <a:rPr lang="en-US"/>
               <a:t/>
             </a:r>
           </a:p>
@@ -915,7 +888,7 @@
         <p:spPr>
           <a:xfrm>
             <a:off x="1143000" y="841680"/>
-            <a:ext cx="6857640" cy="1790280"/>
+            <a:ext cx="6857280" cy="1789920"/>
           </a:xfrm>
           <a:prstGeom prst="rect">
             <a:avLst/>
@@ -930,11 +903,11 @@
             <a:noAutofit/>
           </a:bodyPr>
           <a:p>
-            <a:endParaRPr b="0" lang="en-US" sz="1800" spc="-1" strike="noStrike">
-              <a:solidFill>
-                <a:srgbClr val="000000"/>
-              </a:solidFill>
-              <a:latin typeface="Calibri"/>
+            <a:pPr algn="ctr">
+              <a:buNone/>
+            </a:pPr>
+            <a:endParaRPr b="0" lang="en-US" sz="4400" spc="-1" strike="noStrike">
+              <a:latin typeface="Arial"/>
             </a:endParaRPr>
           </a:p>
         </p:txBody>
@@ -967,20 +940,8 @@
             <a:normAutofit/>
           </a:bodyPr>
           <a:p>
-            <a:pPr>
-              <a:lnSpc>
-                <a:spcPct val="90000"/>
-              </a:lnSpc>
-              <a:spcBef>
-                <a:spcPts val="1417"/>
-              </a:spcBef>
-              <a:buNone/>
-            </a:pPr>
-            <a:endParaRPr b="0" lang="en-US" sz="2100" spc="-1" strike="noStrike">
-              <a:solidFill>
-                <a:srgbClr val="000000"/>
-              </a:solidFill>
-              <a:latin typeface="Calibri"/>
+            <a:endParaRPr b="0" lang="en-US" sz="3200" spc="-1" strike="noStrike">
+              <a:latin typeface="Arial"/>
             </a:endParaRPr>
           </a:p>
         </p:txBody>
@@ -1013,20 +974,8 @@
             <a:normAutofit/>
           </a:bodyPr>
           <a:p>
-            <a:pPr>
-              <a:lnSpc>
-                <a:spcPct val="90000"/>
-              </a:lnSpc>
-              <a:spcBef>
-                <a:spcPts val="1417"/>
-              </a:spcBef>
-              <a:buNone/>
-            </a:pPr>
-            <a:endParaRPr b="0" lang="en-US" sz="2100" spc="-1" strike="noStrike">
-              <a:solidFill>
-                <a:srgbClr val="000000"/>
-              </a:solidFill>
-              <a:latin typeface="Calibri"/>
+            <a:endParaRPr b="0" lang="en-US" sz="3200" spc="-1" strike="noStrike">
+              <a:latin typeface="Arial"/>
             </a:endParaRPr>
           </a:p>
         </p:txBody>
@@ -1059,20 +1008,8 @@
             <a:normAutofit/>
           </a:bodyPr>
           <a:p>
-            <a:pPr>
-              <a:lnSpc>
-                <a:spcPct val="90000"/>
-              </a:lnSpc>
-              <a:spcBef>
-                <a:spcPts val="1417"/>
-              </a:spcBef>
-              <a:buNone/>
-            </a:pPr>
-            <a:endParaRPr b="0" lang="en-US" sz="2100" spc="-1" strike="noStrike">
-              <a:solidFill>
-                <a:srgbClr val="000000"/>
-              </a:solidFill>
-              <a:latin typeface="Calibri"/>
+            <a:endParaRPr b="0" lang="en-US" sz="3200" spc="-1" strike="noStrike">
+              <a:latin typeface="Arial"/>
             </a:endParaRPr>
           </a:p>
         </p:txBody>
@@ -1105,20 +1042,8 @@
             <a:normAutofit/>
           </a:bodyPr>
           <a:p>
-            <a:pPr>
-              <a:lnSpc>
-                <a:spcPct val="90000"/>
-              </a:lnSpc>
-              <a:spcBef>
-                <a:spcPts val="1417"/>
-              </a:spcBef>
-              <a:buNone/>
-            </a:pPr>
-            <a:endParaRPr b="0" lang="en-US" sz="2100" spc="-1" strike="noStrike">
-              <a:solidFill>
-                <a:srgbClr val="000000"/>
-              </a:solidFill>
-              <a:latin typeface="Calibri"/>
+            <a:endParaRPr b="0" lang="en-US" sz="3200" spc="-1" strike="noStrike">
+              <a:latin typeface="Arial"/>
             </a:endParaRPr>
           </a:p>
         </p:txBody>
@@ -1130,7 +1055,7 @@
             <a:spLocks noGrp="1"/>
           </p:cNvSpPr>
           <p:nvPr>
-            <p:ph type="ftr" idx="2"/>
+            <p:ph type="ftr" idx="1"/>
           </p:nvPr>
         </p:nvSpPr>
         <p:spPr/>
@@ -1150,14 +1075,14 @@
             <a:spLocks noGrp="1"/>
           </p:cNvSpPr>
           <p:nvPr>
-            <p:ph type="sldNum" idx="3"/>
+            <p:ph type="sldNum" idx="2"/>
           </p:nvPr>
         </p:nvSpPr>
         <p:spPr/>
         <p:txBody>
           <a:bodyPr/>
           <a:p>
-            <a:fld id="{5A177106-E737-4E7B-8FD0-26BDACD636C6}" type="slidenum">
+            <a:fld id="{EE891E15-D37A-4C4B-B74A-FA089924D03C}" type="slidenum">
               <a:t>&lt;#&gt;</a:t>
             </a:fld>
           </a:p>
@@ -1170,7 +1095,7 @@
             <a:spLocks noGrp="1"/>
           </p:cNvSpPr>
           <p:nvPr>
-            <p:ph type="dt" idx="1"/>
+            <p:ph type="dt" idx="3"/>
           </p:nvPr>
         </p:nvSpPr>
         <p:spPr/>
@@ -1178,7 +1103,7 @@
           <a:bodyPr/>
           <a:p>
             <a:r>
-              <a:rPr lang="ru-RU"/>
+              <a:rPr lang="en-US"/>
               <a:t/>
             </a:r>
           </a:p>
@@ -1219,7 +1144,7 @@
         <p:spPr>
           <a:xfrm>
             <a:off x="1143000" y="841680"/>
-            <a:ext cx="6857640" cy="1790280"/>
+            <a:ext cx="6857280" cy="1789920"/>
           </a:xfrm>
           <a:prstGeom prst="rect">
             <a:avLst/>
@@ -1234,11 +1159,11 @@
             <a:noAutofit/>
           </a:bodyPr>
           <a:p>
-            <a:endParaRPr b="0" lang="en-US" sz="1800" spc="-1" strike="noStrike">
-              <a:solidFill>
-                <a:srgbClr val="000000"/>
-              </a:solidFill>
-              <a:latin typeface="Calibri"/>
+            <a:pPr algn="ctr">
+              <a:buNone/>
+            </a:pPr>
+            <a:endParaRPr b="0" lang="en-US" sz="4400" spc="-1" strike="noStrike">
+              <a:latin typeface="Arial"/>
             </a:endParaRPr>
           </a:p>
         </p:txBody>
@@ -1271,20 +1196,8 @@
             <a:normAutofit/>
           </a:bodyPr>
           <a:p>
-            <a:pPr>
-              <a:lnSpc>
-                <a:spcPct val="90000"/>
-              </a:lnSpc>
-              <a:spcBef>
-                <a:spcPts val="1417"/>
-              </a:spcBef>
-              <a:buNone/>
-            </a:pPr>
-            <a:endParaRPr b="0" lang="en-US" sz="2100" spc="-1" strike="noStrike">
-              <a:solidFill>
-                <a:srgbClr val="000000"/>
-              </a:solidFill>
-              <a:latin typeface="Calibri"/>
+            <a:endParaRPr b="0" lang="en-US" sz="3200" spc="-1" strike="noStrike">
+              <a:latin typeface="Arial"/>
             </a:endParaRPr>
           </a:p>
         </p:txBody>
@@ -1317,20 +1230,8 @@
             <a:normAutofit/>
           </a:bodyPr>
           <a:p>
-            <a:pPr>
-              <a:lnSpc>
-                <a:spcPct val="90000"/>
-              </a:lnSpc>
-              <a:spcBef>
-                <a:spcPts val="1417"/>
-              </a:spcBef>
-              <a:buNone/>
-            </a:pPr>
-            <a:endParaRPr b="0" lang="en-US" sz="2100" spc="-1" strike="noStrike">
-              <a:solidFill>
-                <a:srgbClr val="000000"/>
-              </a:solidFill>
-              <a:latin typeface="Calibri"/>
+            <a:endParaRPr b="0" lang="en-US" sz="3200" spc="-1" strike="noStrike">
+              <a:latin typeface="Arial"/>
             </a:endParaRPr>
           </a:p>
         </p:txBody>
@@ -1363,20 +1264,8 @@
             <a:normAutofit/>
           </a:bodyPr>
           <a:p>
-            <a:pPr>
-              <a:lnSpc>
-                <a:spcPct val="90000"/>
-              </a:lnSpc>
-              <a:spcBef>
-                <a:spcPts val="1417"/>
-              </a:spcBef>
-              <a:buNone/>
-            </a:pPr>
-            <a:endParaRPr b="0" lang="en-US" sz="2100" spc="-1" strike="noStrike">
-              <a:solidFill>
-                <a:srgbClr val="000000"/>
-              </a:solidFill>
-              <a:latin typeface="Calibri"/>
+            <a:endParaRPr b="0" lang="en-US" sz="3200" spc="-1" strike="noStrike">
+              <a:latin typeface="Arial"/>
             </a:endParaRPr>
           </a:p>
         </p:txBody>
@@ -1409,20 +1298,8 @@
             <a:normAutofit/>
           </a:bodyPr>
           <a:p>
-            <a:pPr>
-              <a:lnSpc>
-                <a:spcPct val="90000"/>
-              </a:lnSpc>
-              <a:spcBef>
-                <a:spcPts val="1417"/>
-              </a:spcBef>
-              <a:buNone/>
-            </a:pPr>
-            <a:endParaRPr b="0" lang="en-US" sz="2100" spc="-1" strike="noStrike">
-              <a:solidFill>
-                <a:srgbClr val="000000"/>
-              </a:solidFill>
-              <a:latin typeface="Calibri"/>
+            <a:endParaRPr b="0" lang="en-US" sz="3200" spc="-1" strike="noStrike">
+              <a:latin typeface="Arial"/>
             </a:endParaRPr>
           </a:p>
         </p:txBody>
@@ -1455,20 +1332,8 @@
             <a:normAutofit/>
           </a:bodyPr>
           <a:p>
-            <a:pPr>
-              <a:lnSpc>
-                <a:spcPct val="90000"/>
-              </a:lnSpc>
-              <a:spcBef>
-                <a:spcPts val="1417"/>
-              </a:spcBef>
-              <a:buNone/>
-            </a:pPr>
-            <a:endParaRPr b="0" lang="en-US" sz="2100" spc="-1" strike="noStrike">
-              <a:solidFill>
-                <a:srgbClr val="000000"/>
-              </a:solidFill>
-              <a:latin typeface="Calibri"/>
+            <a:endParaRPr b="0" lang="en-US" sz="3200" spc="-1" strike="noStrike">
+              <a:latin typeface="Arial"/>
             </a:endParaRPr>
           </a:p>
         </p:txBody>
@@ -1501,20 +1366,8 @@
             <a:normAutofit/>
           </a:bodyPr>
           <a:p>
-            <a:pPr>
-              <a:lnSpc>
-                <a:spcPct val="90000"/>
-              </a:lnSpc>
-              <a:spcBef>
-                <a:spcPts val="1417"/>
-              </a:spcBef>
-              <a:buNone/>
-            </a:pPr>
-            <a:endParaRPr b="0" lang="en-US" sz="2100" spc="-1" strike="noStrike">
-              <a:solidFill>
-                <a:srgbClr val="000000"/>
-              </a:solidFill>
-              <a:latin typeface="Calibri"/>
+            <a:endParaRPr b="0" lang="en-US" sz="3200" spc="-1" strike="noStrike">
+              <a:latin typeface="Arial"/>
             </a:endParaRPr>
           </a:p>
         </p:txBody>
@@ -1526,7 +1379,7 @@
             <a:spLocks noGrp="1"/>
           </p:cNvSpPr>
           <p:nvPr>
-            <p:ph type="ftr" idx="2"/>
+            <p:ph type="ftr" idx="1"/>
           </p:nvPr>
         </p:nvSpPr>
         <p:spPr/>
@@ -1546,14 +1399,14 @@
             <a:spLocks noGrp="1"/>
           </p:cNvSpPr>
           <p:nvPr>
-            <p:ph type="sldNum" idx="3"/>
+            <p:ph type="sldNum" idx="2"/>
           </p:nvPr>
         </p:nvSpPr>
         <p:spPr/>
         <p:txBody>
           <a:bodyPr/>
           <a:p>
-            <a:fld id="{35EC6F95-2B2E-435E-95BD-A994EF4C44AE}" type="slidenum">
+            <a:fld id="{2C87A93B-6F01-4F52-A1FE-18DB324CCFB7}" type="slidenum">
               <a:t>&lt;#&gt;</a:t>
             </a:fld>
           </a:p>
@@ -1566,7 +1419,7 @@
             <a:spLocks noGrp="1"/>
           </p:cNvSpPr>
           <p:nvPr>
-            <p:ph type="dt" idx="1"/>
+            <p:ph type="dt" idx="3"/>
           </p:nvPr>
         </p:nvSpPr>
         <p:spPr/>
@@ -1574,7 +1427,7 @@
           <a:bodyPr/>
           <a:p>
             <a:r>
-              <a:rPr lang="ru-RU"/>
+              <a:rPr lang="en-US"/>
               <a:t/>
             </a:r>
           </a:p>
@@ -1615,44 +1468,7 @@
         <p:spPr>
           <a:xfrm>
             <a:off x="1143000" y="841680"/>
-            <a:ext cx="6857640" cy="1790280"/>
-          </a:xfrm>
-          <a:prstGeom prst="rect">
-            <a:avLst/>
-          </a:prstGeom>
-          <a:noFill/>
-          <a:ln w="0">
-            <a:noFill/>
-          </a:ln>
-        </p:spPr>
-        <p:txBody>
-          <a:bodyPr lIns="0" rIns="0" tIns="0" bIns="0" anchor="ctr">
-            <a:noAutofit/>
-          </a:bodyPr>
-          <a:p>
-            <a:endParaRPr b="0" lang="en-US" sz="1800" spc="-1" strike="noStrike">
-              <a:solidFill>
-                <a:srgbClr val="000000"/>
-              </a:solidFill>
-              <a:latin typeface="Calibri"/>
-            </a:endParaRPr>
-          </a:p>
-        </p:txBody>
-      </p:sp>
-      <p:sp>
-        <p:nvSpPr>
-          <p:cNvPr id="6" name="PlaceHolder 2"/>
-          <p:cNvSpPr>
-            <a:spLocks noGrp="1"/>
-          </p:cNvSpPr>
-          <p:nvPr>
-            <p:ph type="subTitle"/>
-          </p:nvPr>
-        </p:nvSpPr>
-        <p:spPr>
-          <a:xfrm>
-            <a:off x="457200" y="1203480"/>
-            <a:ext cx="8229240" cy="2982960"/>
+            <a:ext cx="6857280" cy="1789920"/>
           </a:xfrm>
           <a:prstGeom prst="rect">
             <a:avLst/>
@@ -1670,7 +1486,44 @@
             <a:pPr algn="ctr">
               <a:buNone/>
             </a:pPr>
-            <a:endParaRPr b="0" lang="ru-RU" sz="3200" spc="-1" strike="noStrike">
+            <a:endParaRPr b="0" lang="en-US" sz="4400" spc="-1" strike="noStrike">
+              <a:latin typeface="Arial"/>
+            </a:endParaRPr>
+          </a:p>
+        </p:txBody>
+      </p:sp>
+      <p:sp>
+        <p:nvSpPr>
+          <p:cNvPr id="6" name="PlaceHolder 2"/>
+          <p:cNvSpPr>
+            <a:spLocks noGrp="1"/>
+          </p:cNvSpPr>
+          <p:nvPr>
+            <p:ph type="subTitle"/>
+          </p:nvPr>
+        </p:nvSpPr>
+        <p:spPr>
+          <a:xfrm>
+            <a:off x="457200" y="1203480"/>
+            <a:ext cx="8229240" cy="2982960"/>
+          </a:xfrm>
+          <a:prstGeom prst="rect">
+            <a:avLst/>
+          </a:prstGeom>
+          <a:noFill/>
+          <a:ln w="0">
+            <a:noFill/>
+          </a:ln>
+        </p:spPr>
+        <p:txBody>
+          <a:bodyPr lIns="0" rIns="0" tIns="0" bIns="0" anchor="ctr">
+            <a:noAutofit/>
+          </a:bodyPr>
+          <a:p>
+            <a:pPr algn="ctr">
+              <a:buNone/>
+            </a:pPr>
+            <a:endParaRPr b="0" lang="en-US" sz="3200" spc="-1" strike="noStrike">
               <a:latin typeface="Arial"/>
             </a:endParaRPr>
           </a:p>
@@ -1683,7 +1536,7 @@
             <a:spLocks noGrp="1"/>
           </p:cNvSpPr>
           <p:nvPr>
-            <p:ph type="ftr" idx="2"/>
+            <p:ph type="ftr" idx="1"/>
           </p:nvPr>
         </p:nvSpPr>
         <p:spPr/>
@@ -1703,14 +1556,14 @@
             <a:spLocks noGrp="1"/>
           </p:cNvSpPr>
           <p:nvPr>
-            <p:ph type="sldNum" idx="3"/>
+            <p:ph type="sldNum" idx="2"/>
           </p:nvPr>
         </p:nvSpPr>
         <p:spPr/>
         <p:txBody>
           <a:bodyPr/>
           <a:p>
-            <a:fld id="{8B63C8F4-A60E-4983-8476-0C53B3DCA9CC}" type="slidenum">
+            <a:fld id="{D1E3700F-104A-48F4-9DCC-D2C39BCAC26D}" type="slidenum">
               <a:t>&lt;#&gt;</a:t>
             </a:fld>
           </a:p>
@@ -1723,7 +1576,7 @@
             <a:spLocks noGrp="1"/>
           </p:cNvSpPr>
           <p:nvPr>
-            <p:ph type="dt" idx="1"/>
+            <p:ph type="dt" idx="3"/>
           </p:nvPr>
         </p:nvSpPr>
         <p:spPr/>
@@ -1731,7 +1584,7 @@
           <a:bodyPr/>
           <a:p>
             <a:r>
-              <a:rPr lang="ru-RU"/>
+              <a:rPr lang="en-US"/>
               <a:t/>
             </a:r>
           </a:p>
@@ -1772,7 +1625,7 @@
         <p:spPr>
           <a:xfrm>
             <a:off x="1143000" y="841680"/>
-            <a:ext cx="6857640" cy="1790280"/>
+            <a:ext cx="6857280" cy="1789920"/>
           </a:xfrm>
           <a:prstGeom prst="rect">
             <a:avLst/>
@@ -1787,11 +1640,11 @@
             <a:noAutofit/>
           </a:bodyPr>
           <a:p>
-            <a:endParaRPr b="0" lang="en-US" sz="1800" spc="-1" strike="noStrike">
-              <a:solidFill>
-                <a:srgbClr val="000000"/>
-              </a:solidFill>
-              <a:latin typeface="Calibri"/>
+            <a:pPr algn="ctr">
+              <a:buNone/>
+            </a:pPr>
+            <a:endParaRPr b="0" lang="en-US" sz="4400" spc="-1" strike="noStrike">
+              <a:latin typeface="Arial"/>
             </a:endParaRPr>
           </a:p>
         </p:txBody>
@@ -1824,20 +1677,8 @@
             <a:normAutofit/>
           </a:bodyPr>
           <a:p>
-            <a:pPr>
-              <a:lnSpc>
-                <a:spcPct val="90000"/>
-              </a:lnSpc>
-              <a:spcBef>
-                <a:spcPts val="1417"/>
-              </a:spcBef>
-              <a:buNone/>
-            </a:pPr>
-            <a:endParaRPr b="0" lang="en-US" sz="2100" spc="-1" strike="noStrike">
-              <a:solidFill>
-                <a:srgbClr val="000000"/>
-              </a:solidFill>
-              <a:latin typeface="Calibri"/>
+            <a:endParaRPr b="0" lang="en-US" sz="3200" spc="-1" strike="noStrike">
+              <a:latin typeface="Arial"/>
             </a:endParaRPr>
           </a:p>
         </p:txBody>
@@ -1849,7 +1690,7 @@
             <a:spLocks noGrp="1"/>
           </p:cNvSpPr>
           <p:nvPr>
-            <p:ph type="ftr" idx="2"/>
+            <p:ph type="ftr" idx="1"/>
           </p:nvPr>
         </p:nvSpPr>
         <p:spPr/>
@@ -1869,14 +1710,14 @@
             <a:spLocks noGrp="1"/>
           </p:cNvSpPr>
           <p:nvPr>
-            <p:ph type="sldNum" idx="3"/>
+            <p:ph type="sldNum" idx="2"/>
           </p:nvPr>
         </p:nvSpPr>
         <p:spPr/>
         <p:txBody>
           <a:bodyPr/>
           <a:p>
-            <a:fld id="{7762D00E-F246-43E7-AD36-66B10A547228}" type="slidenum">
+            <a:fld id="{EB10A4C7-8A0D-4EF1-A2E8-8A36028DD98E}" type="slidenum">
               <a:t>&lt;#&gt;</a:t>
             </a:fld>
           </a:p>
@@ -1889,7 +1730,7 @@
             <a:spLocks noGrp="1"/>
           </p:cNvSpPr>
           <p:nvPr>
-            <p:ph type="dt" idx="1"/>
+            <p:ph type="dt" idx="3"/>
           </p:nvPr>
         </p:nvSpPr>
         <p:spPr/>
@@ -1897,7 +1738,7 @@
           <a:bodyPr/>
           <a:p>
             <a:r>
-              <a:rPr lang="ru-RU"/>
+              <a:rPr lang="en-US"/>
               <a:t/>
             </a:r>
           </a:p>
@@ -1938,7 +1779,7 @@
         <p:spPr>
           <a:xfrm>
             <a:off x="1143000" y="841680"/>
-            <a:ext cx="6857640" cy="1790280"/>
+            <a:ext cx="6857280" cy="1789920"/>
           </a:xfrm>
           <a:prstGeom prst="rect">
             <a:avLst/>
@@ -1953,11 +1794,11 @@
             <a:noAutofit/>
           </a:bodyPr>
           <a:p>
-            <a:endParaRPr b="0" lang="en-US" sz="1800" spc="-1" strike="noStrike">
-              <a:solidFill>
-                <a:srgbClr val="000000"/>
-              </a:solidFill>
-              <a:latin typeface="Calibri"/>
+            <a:pPr algn="ctr">
+              <a:buNone/>
+            </a:pPr>
+            <a:endParaRPr b="0" lang="en-US" sz="4400" spc="-1" strike="noStrike">
+              <a:latin typeface="Arial"/>
             </a:endParaRPr>
           </a:p>
         </p:txBody>
@@ -1990,20 +1831,8 @@
             <a:normAutofit/>
           </a:bodyPr>
           <a:p>
-            <a:pPr>
-              <a:lnSpc>
-                <a:spcPct val="90000"/>
-              </a:lnSpc>
-              <a:spcBef>
-                <a:spcPts val="1417"/>
-              </a:spcBef>
-              <a:buNone/>
-            </a:pPr>
-            <a:endParaRPr b="0" lang="en-US" sz="2100" spc="-1" strike="noStrike">
-              <a:solidFill>
-                <a:srgbClr val="000000"/>
-              </a:solidFill>
-              <a:latin typeface="Calibri"/>
+            <a:endParaRPr b="0" lang="en-US" sz="3200" spc="-1" strike="noStrike">
+              <a:latin typeface="Arial"/>
             </a:endParaRPr>
           </a:p>
         </p:txBody>
@@ -2036,20 +1865,8 @@
             <a:normAutofit/>
           </a:bodyPr>
           <a:p>
-            <a:pPr>
-              <a:lnSpc>
-                <a:spcPct val="90000"/>
-              </a:lnSpc>
-              <a:spcBef>
-                <a:spcPts val="1417"/>
-              </a:spcBef>
-              <a:buNone/>
-            </a:pPr>
-            <a:endParaRPr b="0" lang="en-US" sz="2100" spc="-1" strike="noStrike">
-              <a:solidFill>
-                <a:srgbClr val="000000"/>
-              </a:solidFill>
-              <a:latin typeface="Calibri"/>
+            <a:endParaRPr b="0" lang="en-US" sz="3200" spc="-1" strike="noStrike">
+              <a:latin typeface="Arial"/>
             </a:endParaRPr>
           </a:p>
         </p:txBody>
@@ -2061,7 +1878,7 @@
             <a:spLocks noGrp="1"/>
           </p:cNvSpPr>
           <p:nvPr>
-            <p:ph type="ftr" idx="2"/>
+            <p:ph type="ftr" idx="1"/>
           </p:nvPr>
         </p:nvSpPr>
         <p:spPr/>
@@ -2081,14 +1898,14 @@
             <a:spLocks noGrp="1"/>
           </p:cNvSpPr>
           <p:nvPr>
-            <p:ph type="sldNum" idx="3"/>
+            <p:ph type="sldNum" idx="2"/>
           </p:nvPr>
         </p:nvSpPr>
         <p:spPr/>
         <p:txBody>
           <a:bodyPr/>
           <a:p>
-            <a:fld id="{0EB6FA13-373A-4914-804A-67E16E6083DA}" type="slidenum">
+            <a:fld id="{8F6838C1-0D27-4ADA-A992-F1DDC3068E42}" type="slidenum">
               <a:t>&lt;#&gt;</a:t>
             </a:fld>
           </a:p>
@@ -2101,7 +1918,7 @@
             <a:spLocks noGrp="1"/>
           </p:cNvSpPr>
           <p:nvPr>
-            <p:ph type="dt" idx="1"/>
+            <p:ph type="dt" idx="3"/>
           </p:nvPr>
         </p:nvSpPr>
         <p:spPr/>
@@ -2109,7 +1926,7 @@
           <a:bodyPr/>
           <a:p>
             <a:r>
-              <a:rPr lang="ru-RU"/>
+              <a:rPr lang="en-US"/>
               <a:t/>
             </a:r>
           </a:p>
@@ -2150,7 +1967,7 @@
         <p:spPr>
           <a:xfrm>
             <a:off x="1143000" y="841680"/>
-            <a:ext cx="6857640" cy="1790280"/>
+            <a:ext cx="6857280" cy="1789920"/>
           </a:xfrm>
           <a:prstGeom prst="rect">
             <a:avLst/>
@@ -2165,11 +1982,11 @@
             <a:noAutofit/>
           </a:bodyPr>
           <a:p>
-            <a:endParaRPr b="0" lang="en-US" sz="1800" spc="-1" strike="noStrike">
-              <a:solidFill>
-                <a:srgbClr val="000000"/>
-              </a:solidFill>
-              <a:latin typeface="Calibri"/>
+            <a:pPr algn="ctr">
+              <a:buNone/>
+            </a:pPr>
+            <a:endParaRPr b="0" lang="en-US" sz="4400" spc="-1" strike="noStrike">
+              <a:latin typeface="Arial"/>
             </a:endParaRPr>
           </a:p>
         </p:txBody>
@@ -2181,7 +1998,7 @@
             <a:spLocks noGrp="1"/>
           </p:cNvSpPr>
           <p:nvPr>
-            <p:ph type="ftr" idx="2"/>
+            <p:ph type="ftr" idx="1"/>
           </p:nvPr>
         </p:nvSpPr>
         <p:spPr/>
@@ -2201,14 +2018,14 @@
             <a:spLocks noGrp="1"/>
           </p:cNvSpPr>
           <p:nvPr>
-            <p:ph type="sldNum" idx="3"/>
+            <p:ph type="sldNum" idx="2"/>
           </p:nvPr>
         </p:nvSpPr>
         <p:spPr/>
         <p:txBody>
           <a:bodyPr/>
           <a:p>
-            <a:fld id="{59108BFD-9F07-40E5-8461-D98418DEE66A}" type="slidenum">
+            <a:fld id="{EC1DACAE-1D11-454E-AFFB-85F98EA9FAF4}" type="slidenum">
               <a:t>&lt;#&gt;</a:t>
             </a:fld>
           </a:p>
@@ -2221,7 +2038,7 @@
             <a:spLocks noGrp="1"/>
           </p:cNvSpPr>
           <p:nvPr>
-            <p:ph type="dt" idx="1"/>
+            <p:ph type="dt" idx="3"/>
           </p:nvPr>
         </p:nvSpPr>
         <p:spPr/>
@@ -2229,7 +2046,7 @@
           <a:bodyPr/>
           <a:p>
             <a:r>
-              <a:rPr lang="ru-RU"/>
+              <a:rPr lang="en-US"/>
               <a:t/>
             </a:r>
           </a:p>
@@ -2270,7 +2087,7 @@
         <p:spPr>
           <a:xfrm>
             <a:off x="1143000" y="841680"/>
-            <a:ext cx="6857640" cy="8299800"/>
+            <a:ext cx="6857280" cy="8298360"/>
           </a:xfrm>
           <a:prstGeom prst="rect">
             <a:avLst/>
@@ -2288,7 +2105,7 @@
             <a:pPr algn="ctr">
               <a:buNone/>
             </a:pPr>
-            <a:endParaRPr b="0" lang="ru-RU" sz="3200" spc="-1" strike="noStrike">
+            <a:endParaRPr b="0" lang="en-US" sz="3200" spc="-1" strike="noStrike">
               <a:latin typeface="Arial"/>
             </a:endParaRPr>
           </a:p>
@@ -2301,7 +2118,7 @@
             <a:spLocks noGrp="1"/>
           </p:cNvSpPr>
           <p:nvPr>
-            <p:ph type="ftr" idx="2"/>
+            <p:ph type="ftr" idx="1"/>
           </p:nvPr>
         </p:nvSpPr>
         <p:spPr/>
@@ -2321,14 +2138,14 @@
             <a:spLocks noGrp="1"/>
           </p:cNvSpPr>
           <p:nvPr>
-            <p:ph type="sldNum" idx="3"/>
+            <p:ph type="sldNum" idx="2"/>
           </p:nvPr>
         </p:nvSpPr>
         <p:spPr/>
         <p:txBody>
           <a:bodyPr/>
           <a:p>
-            <a:fld id="{67D86BF9-D4A9-4409-A2E4-EA9613B86B9C}" type="slidenum">
+            <a:fld id="{63DF2627-C93A-4D87-8966-827AD938AAF5}" type="slidenum">
               <a:t>&lt;#&gt;</a:t>
             </a:fld>
           </a:p>
@@ -2341,7 +2158,7 @@
             <a:spLocks noGrp="1"/>
           </p:cNvSpPr>
           <p:nvPr>
-            <p:ph type="dt" idx="1"/>
+            <p:ph type="dt" idx="3"/>
           </p:nvPr>
         </p:nvSpPr>
         <p:spPr/>
@@ -2349,7 +2166,7 @@
           <a:bodyPr/>
           <a:p>
             <a:r>
-              <a:rPr lang="ru-RU"/>
+              <a:rPr lang="en-US"/>
               <a:t/>
             </a:r>
           </a:p>
@@ -2390,7 +2207,7 @@
         <p:spPr>
           <a:xfrm>
             <a:off x="1143000" y="841680"/>
-            <a:ext cx="6857640" cy="1790280"/>
+            <a:ext cx="6857280" cy="1789920"/>
           </a:xfrm>
           <a:prstGeom prst="rect">
             <a:avLst/>
@@ -2405,11 +2222,11 @@
             <a:noAutofit/>
           </a:bodyPr>
           <a:p>
-            <a:endParaRPr b="0" lang="en-US" sz="1800" spc="-1" strike="noStrike">
-              <a:solidFill>
-                <a:srgbClr val="000000"/>
-              </a:solidFill>
-              <a:latin typeface="Calibri"/>
+            <a:pPr algn="ctr">
+              <a:buNone/>
+            </a:pPr>
+            <a:endParaRPr b="0" lang="en-US" sz="4400" spc="-1" strike="noStrike">
+              <a:latin typeface="Arial"/>
             </a:endParaRPr>
           </a:p>
         </p:txBody>
@@ -2442,20 +2259,8 @@
             <a:normAutofit/>
           </a:bodyPr>
           <a:p>
-            <a:pPr>
-              <a:lnSpc>
-                <a:spcPct val="90000"/>
-              </a:lnSpc>
-              <a:spcBef>
-                <a:spcPts val="1417"/>
-              </a:spcBef>
-              <a:buNone/>
-            </a:pPr>
-            <a:endParaRPr b="0" lang="en-US" sz="2100" spc="-1" strike="noStrike">
-              <a:solidFill>
-                <a:srgbClr val="000000"/>
-              </a:solidFill>
-              <a:latin typeface="Calibri"/>
+            <a:endParaRPr b="0" lang="en-US" sz="3200" spc="-1" strike="noStrike">
+              <a:latin typeface="Arial"/>
             </a:endParaRPr>
           </a:p>
         </p:txBody>
@@ -2488,20 +2293,8 @@
             <a:normAutofit/>
           </a:bodyPr>
           <a:p>
-            <a:pPr>
-              <a:lnSpc>
-                <a:spcPct val="90000"/>
-              </a:lnSpc>
-              <a:spcBef>
-                <a:spcPts val="1417"/>
-              </a:spcBef>
-              <a:buNone/>
-            </a:pPr>
-            <a:endParaRPr b="0" lang="en-US" sz="2100" spc="-1" strike="noStrike">
-              <a:solidFill>
-                <a:srgbClr val="000000"/>
-              </a:solidFill>
-              <a:latin typeface="Calibri"/>
+            <a:endParaRPr b="0" lang="en-US" sz="3200" spc="-1" strike="noStrike">
+              <a:latin typeface="Arial"/>
             </a:endParaRPr>
           </a:p>
         </p:txBody>
@@ -2534,20 +2327,8 @@
             <a:normAutofit/>
           </a:bodyPr>
           <a:p>
-            <a:pPr>
-              <a:lnSpc>
-                <a:spcPct val="90000"/>
-              </a:lnSpc>
-              <a:spcBef>
-                <a:spcPts val="1417"/>
-              </a:spcBef>
-              <a:buNone/>
-            </a:pPr>
-            <a:endParaRPr b="0" lang="en-US" sz="2100" spc="-1" strike="noStrike">
-              <a:solidFill>
-                <a:srgbClr val="000000"/>
-              </a:solidFill>
-              <a:latin typeface="Calibri"/>
+            <a:endParaRPr b="0" lang="en-US" sz="3200" spc="-1" strike="noStrike">
+              <a:latin typeface="Arial"/>
             </a:endParaRPr>
           </a:p>
         </p:txBody>
@@ -2559,7 +2340,7 @@
             <a:spLocks noGrp="1"/>
           </p:cNvSpPr>
           <p:nvPr>
-            <p:ph type="ftr" idx="2"/>
+            <p:ph type="ftr" idx="1"/>
           </p:nvPr>
         </p:nvSpPr>
         <p:spPr/>
@@ -2579,14 +2360,14 @@
             <a:spLocks noGrp="1"/>
           </p:cNvSpPr>
           <p:nvPr>
-            <p:ph type="sldNum" idx="3"/>
+            <p:ph type="sldNum" idx="2"/>
           </p:nvPr>
         </p:nvSpPr>
         <p:spPr/>
         <p:txBody>
           <a:bodyPr/>
           <a:p>
-            <a:fld id="{7ACF3911-B9EC-4811-8723-30E5727BD571}" type="slidenum">
+            <a:fld id="{D13DDF52-7EF5-4D45-B26F-A72DA969602E}" type="slidenum">
               <a:t>&lt;#&gt;</a:t>
             </a:fld>
           </a:p>
@@ -2599,7 +2380,7 @@
             <a:spLocks noGrp="1"/>
           </p:cNvSpPr>
           <p:nvPr>
-            <p:ph type="dt" idx="1"/>
+            <p:ph type="dt" idx="3"/>
           </p:nvPr>
         </p:nvSpPr>
         <p:spPr/>
@@ -2607,7 +2388,7 @@
           <a:bodyPr/>
           <a:p>
             <a:r>
-              <a:rPr lang="ru-RU"/>
+              <a:rPr lang="en-US"/>
               <a:t/>
             </a:r>
           </a:p>
@@ -2648,7 +2429,7 @@
         <p:spPr>
           <a:xfrm>
             <a:off x="1143000" y="841680"/>
-            <a:ext cx="6857640" cy="1790280"/>
+            <a:ext cx="6857280" cy="1789920"/>
           </a:xfrm>
           <a:prstGeom prst="rect">
             <a:avLst/>
@@ -2663,11 +2444,11 @@
             <a:noAutofit/>
           </a:bodyPr>
           <a:p>
-            <a:endParaRPr b="0" lang="en-US" sz="1800" spc="-1" strike="noStrike">
-              <a:solidFill>
-                <a:srgbClr val="000000"/>
-              </a:solidFill>
-              <a:latin typeface="Calibri"/>
+            <a:pPr algn="ctr">
+              <a:buNone/>
+            </a:pPr>
+            <a:endParaRPr b="0" lang="en-US" sz="4400" spc="-1" strike="noStrike">
+              <a:latin typeface="Arial"/>
             </a:endParaRPr>
           </a:p>
         </p:txBody>
@@ -2700,20 +2481,8 @@
             <a:normAutofit/>
           </a:bodyPr>
           <a:p>
-            <a:pPr>
-              <a:lnSpc>
-                <a:spcPct val="90000"/>
-              </a:lnSpc>
-              <a:spcBef>
-                <a:spcPts val="1417"/>
-              </a:spcBef>
-              <a:buNone/>
-            </a:pPr>
-            <a:endParaRPr b="0" lang="en-US" sz="2100" spc="-1" strike="noStrike">
-              <a:solidFill>
-                <a:srgbClr val="000000"/>
-              </a:solidFill>
-              <a:latin typeface="Calibri"/>
+            <a:endParaRPr b="0" lang="en-US" sz="3200" spc="-1" strike="noStrike">
+              <a:latin typeface="Arial"/>
             </a:endParaRPr>
           </a:p>
         </p:txBody>
@@ -2746,20 +2515,8 @@
             <a:normAutofit/>
           </a:bodyPr>
           <a:p>
-            <a:pPr>
-              <a:lnSpc>
-                <a:spcPct val="90000"/>
-              </a:lnSpc>
-              <a:spcBef>
-                <a:spcPts val="1417"/>
-              </a:spcBef>
-              <a:buNone/>
-            </a:pPr>
-            <a:endParaRPr b="0" lang="en-US" sz="2100" spc="-1" strike="noStrike">
-              <a:solidFill>
-                <a:srgbClr val="000000"/>
-              </a:solidFill>
-              <a:latin typeface="Calibri"/>
+            <a:endParaRPr b="0" lang="en-US" sz="3200" spc="-1" strike="noStrike">
+              <a:latin typeface="Arial"/>
             </a:endParaRPr>
           </a:p>
         </p:txBody>
@@ -2792,20 +2549,8 @@
             <a:normAutofit/>
           </a:bodyPr>
           <a:p>
-            <a:pPr>
-              <a:lnSpc>
-                <a:spcPct val="90000"/>
-              </a:lnSpc>
-              <a:spcBef>
-                <a:spcPts val="1417"/>
-              </a:spcBef>
-              <a:buNone/>
-            </a:pPr>
-            <a:endParaRPr b="0" lang="en-US" sz="2100" spc="-1" strike="noStrike">
-              <a:solidFill>
-                <a:srgbClr val="000000"/>
-              </a:solidFill>
-              <a:latin typeface="Calibri"/>
+            <a:endParaRPr b="0" lang="en-US" sz="3200" spc="-1" strike="noStrike">
+              <a:latin typeface="Arial"/>
             </a:endParaRPr>
           </a:p>
         </p:txBody>
@@ -2817,7 +2562,7 @@
             <a:spLocks noGrp="1"/>
           </p:cNvSpPr>
           <p:nvPr>
-            <p:ph type="ftr" idx="2"/>
+            <p:ph type="ftr" idx="1"/>
           </p:nvPr>
         </p:nvSpPr>
         <p:spPr/>
@@ -2837,14 +2582,14 @@
             <a:spLocks noGrp="1"/>
           </p:cNvSpPr>
           <p:nvPr>
-            <p:ph type="sldNum" idx="3"/>
+            <p:ph type="sldNum" idx="2"/>
           </p:nvPr>
         </p:nvSpPr>
         <p:spPr/>
         <p:txBody>
           <a:bodyPr/>
           <a:p>
-            <a:fld id="{5A4BE984-B96A-4956-9DC3-C7B45656C2ED}" type="slidenum">
+            <a:fld id="{28F6E617-8694-497E-AEDA-05F1B63CCA72}" type="slidenum">
               <a:t>&lt;#&gt;</a:t>
             </a:fld>
           </a:p>
@@ -2857,7 +2602,7 @@
             <a:spLocks noGrp="1"/>
           </p:cNvSpPr>
           <p:nvPr>
-            <p:ph type="dt" idx="1"/>
+            <p:ph type="dt" idx="3"/>
           </p:nvPr>
         </p:nvSpPr>
         <p:spPr/>
@@ -2865,7 +2610,7 @@
           <a:bodyPr/>
           <a:p>
             <a:r>
-              <a:rPr lang="ru-RU"/>
+              <a:rPr lang="en-US"/>
               <a:t/>
             </a:r>
           </a:p>
@@ -2906,7 +2651,7 @@
         <p:spPr>
           <a:xfrm>
             <a:off x="1143000" y="841680"/>
-            <a:ext cx="6857640" cy="1790280"/>
+            <a:ext cx="6857280" cy="1789920"/>
           </a:xfrm>
           <a:prstGeom prst="rect">
             <a:avLst/>
@@ -2921,11 +2666,11 @@
             <a:noAutofit/>
           </a:bodyPr>
           <a:p>
-            <a:endParaRPr b="0" lang="en-US" sz="1800" spc="-1" strike="noStrike">
-              <a:solidFill>
-                <a:srgbClr val="000000"/>
-              </a:solidFill>
-              <a:latin typeface="Calibri"/>
+            <a:pPr algn="ctr">
+              <a:buNone/>
+            </a:pPr>
+            <a:endParaRPr b="0" lang="en-US" sz="4400" spc="-1" strike="noStrike">
+              <a:latin typeface="Arial"/>
             </a:endParaRPr>
           </a:p>
         </p:txBody>
@@ -2958,20 +2703,8 @@
             <a:normAutofit/>
           </a:bodyPr>
           <a:p>
-            <a:pPr>
-              <a:lnSpc>
-                <a:spcPct val="90000"/>
-              </a:lnSpc>
-              <a:spcBef>
-                <a:spcPts val="1417"/>
-              </a:spcBef>
-              <a:buNone/>
-            </a:pPr>
-            <a:endParaRPr b="0" lang="en-US" sz="2100" spc="-1" strike="noStrike">
-              <a:solidFill>
-                <a:srgbClr val="000000"/>
-              </a:solidFill>
-              <a:latin typeface="Calibri"/>
+            <a:endParaRPr b="0" lang="en-US" sz="3200" spc="-1" strike="noStrike">
+              <a:latin typeface="Arial"/>
             </a:endParaRPr>
           </a:p>
         </p:txBody>
@@ -3004,20 +2737,8 @@
             <a:normAutofit/>
           </a:bodyPr>
           <a:p>
-            <a:pPr>
-              <a:lnSpc>
-                <a:spcPct val="90000"/>
-              </a:lnSpc>
-              <a:spcBef>
-                <a:spcPts val="1417"/>
-              </a:spcBef>
-              <a:buNone/>
-            </a:pPr>
-            <a:endParaRPr b="0" lang="en-US" sz="2100" spc="-1" strike="noStrike">
-              <a:solidFill>
-                <a:srgbClr val="000000"/>
-              </a:solidFill>
-              <a:latin typeface="Calibri"/>
+            <a:endParaRPr b="0" lang="en-US" sz="3200" spc="-1" strike="noStrike">
+              <a:latin typeface="Arial"/>
             </a:endParaRPr>
           </a:p>
         </p:txBody>
@@ -3050,20 +2771,8 @@
             <a:normAutofit/>
           </a:bodyPr>
           <a:p>
-            <a:pPr>
-              <a:lnSpc>
-                <a:spcPct val="90000"/>
-              </a:lnSpc>
-              <a:spcBef>
-                <a:spcPts val="1417"/>
-              </a:spcBef>
-              <a:buNone/>
-            </a:pPr>
-            <a:endParaRPr b="0" lang="en-US" sz="2100" spc="-1" strike="noStrike">
-              <a:solidFill>
-                <a:srgbClr val="000000"/>
-              </a:solidFill>
-              <a:latin typeface="Calibri"/>
+            <a:endParaRPr b="0" lang="en-US" sz="3200" spc="-1" strike="noStrike">
+              <a:latin typeface="Arial"/>
             </a:endParaRPr>
           </a:p>
         </p:txBody>
@@ -3075,7 +2784,7 @@
             <a:spLocks noGrp="1"/>
           </p:cNvSpPr>
           <p:nvPr>
-            <p:ph type="ftr" idx="2"/>
+            <p:ph type="ftr" idx="1"/>
           </p:nvPr>
         </p:nvSpPr>
         <p:spPr/>
@@ -3095,14 +2804,14 @@
             <a:spLocks noGrp="1"/>
           </p:cNvSpPr>
           <p:nvPr>
-            <p:ph type="sldNum" idx="3"/>
+            <p:ph type="sldNum" idx="2"/>
           </p:nvPr>
         </p:nvSpPr>
         <p:spPr/>
         <p:txBody>
           <a:bodyPr/>
           <a:p>
-            <a:fld id="{5A379BA1-9BB5-4CC5-850A-8E024AC3D2B8}" type="slidenum">
+            <a:fld id="{C5337126-6D0C-4D1E-8A35-1E90C94736DC}" type="slidenum">
               <a:t>&lt;#&gt;</a:t>
             </a:fld>
           </a:p>
@@ -3115,7 +2824,7 @@
             <a:spLocks noGrp="1"/>
           </p:cNvSpPr>
           <p:nvPr>
-            <p:ph type="dt" idx="1"/>
+            <p:ph type="dt" idx="3"/>
           </p:nvPr>
         </p:nvSpPr>
         <p:spPr/>
@@ -3123,7 +2832,7 @@
           <a:bodyPr/>
           <a:p>
             <a:r>
-              <a:rPr lang="ru-RU"/>
+              <a:rPr lang="en-US"/>
               <a:t/>
             </a:r>
           </a:p>
@@ -3171,41 +2880,29 @@
         <p:spPr>
           <a:xfrm>
             <a:off x="1143000" y="841680"/>
-            <a:ext cx="6857640" cy="1790280"/>
-          </a:xfrm>
-          <a:prstGeom prst="rect">
-            <a:avLst/>
-          </a:prstGeom>
-          <a:noFill/>
-          <a:ln w="0">
-            <a:noFill/>
-          </a:ln>
-        </p:spPr>
-        <p:txBody>
-          <a:bodyPr anchor="b">
+            <a:ext cx="6857280" cy="1789920"/>
+          </a:xfrm>
+          <a:prstGeom prst="rect">
+            <a:avLst/>
+          </a:prstGeom>
+          <a:noFill/>
+          <a:ln w="0">
+            <a:noFill/>
+          </a:ln>
+        </p:spPr>
+        <p:txBody>
+          <a:bodyPr lIns="0" rIns="0" tIns="0" bIns="0" anchor="ctr">
             <a:noAutofit/>
           </a:bodyPr>
           <a:p>
-            <a:pPr algn="ctr">
-              <a:lnSpc>
-                <a:spcPct val="90000"/>
-              </a:lnSpc>
-              <a:buNone/>
-            </a:pPr>
-            <a:r>
-              <a:rPr b="0" lang="ru-RU" sz="4500" spc="-1" strike="noStrike">
-                <a:solidFill>
-                  <a:srgbClr val="000000"/>
-                </a:solidFill>
-                <a:latin typeface="Calibri Light"/>
-              </a:rPr>
-              <a:t>Образец заголовка</a:t>
-            </a:r>
-            <a:endParaRPr b="0" lang="en-US" sz="4500" spc="-1" strike="noStrike">
-              <a:solidFill>
-                <a:srgbClr val="000000"/>
-              </a:solidFill>
-              <a:latin typeface="Calibri"/>
+            <a:r>
+              <a:rPr b="0" lang="en-US" sz="1800" spc="-1" strike="noStrike">
+                <a:latin typeface="Arial"/>
+              </a:rPr>
+              <a:t>Click to edit the title text format</a:t>
+            </a:r>
+            <a:endParaRPr b="0" lang="en-US" sz="1800" spc="-1" strike="noStrike">
+              <a:latin typeface="Arial"/>
             </a:endParaRPr>
           </a:p>
         </p:txBody>
@@ -3217,91 +2914,31 @@
             <a:spLocks noGrp="1"/>
           </p:cNvSpPr>
           <p:nvPr>
-            <p:ph type="dt" idx="1"/>
-          </p:nvPr>
-        </p:nvSpPr>
-        <p:spPr>
-          <a:xfrm>
-            <a:off x="628560" y="4767120"/>
-            <a:ext cx="2057040" cy="273600"/>
-          </a:xfrm>
-          <a:prstGeom prst="rect">
-            <a:avLst/>
-          </a:prstGeom>
-          <a:noFill/>
-          <a:ln w="0">
-            <a:noFill/>
-          </a:ln>
-        </p:spPr>
-        <p:txBody>
-          <a:bodyPr anchor="ctr">
+            <p:ph type="ftr" idx="1"/>
+          </p:nvPr>
+        </p:nvSpPr>
+        <p:spPr>
+          <a:xfrm>
+            <a:off x="3029040" y="4767120"/>
+            <a:ext cx="3085560" cy="273240"/>
+          </a:xfrm>
+          <a:prstGeom prst="rect">
+            <a:avLst/>
+          </a:prstGeom>
+          <a:noFill/>
+          <a:ln w="0">
+            <a:noFill/>
+          </a:ln>
+        </p:spPr>
+        <p:txBody>
+          <a:bodyPr lIns="90000" rIns="90000" tIns="45000" bIns="45000" anchor="ctr">
             <a:noAutofit/>
           </a:bodyPr>
           <a:lstStyle>
-            <a:lvl1pPr>
+            <a:lvl1pPr algn="ctr">
               <a:lnSpc>
                 <a:spcPct val="100000"/>
               </a:lnSpc>
-              <a:buNone/>
-              <a:defRPr b="0" lang="en-US" sz="900" spc="-1" strike="noStrike">
-                <a:solidFill>
-                  <a:srgbClr val="8b8b8b"/>
-                </a:solidFill>
-                <a:latin typeface="Calibri"/>
-              </a:defRPr>
-            </a:lvl1pPr>
-          </a:lstStyle>
-          <a:p>
-            <a:pPr>
-              <a:lnSpc>
-                <a:spcPct val="100000"/>
-              </a:lnSpc>
-              <a:buNone/>
-            </a:pPr>
-            <a:r>
-              <a:rPr b="0" lang="en-US" sz="900" spc="-1" strike="noStrike">
-                <a:solidFill>
-                  <a:srgbClr val="8b8b8b"/>
-                </a:solidFill>
-                <a:latin typeface="Calibri"/>
-              </a:rPr>
-              <a:t>&lt;дата/время&gt;</a:t>
-            </a:r>
-            <a:endParaRPr b="0" lang="ru-RU" sz="900" spc="-1" strike="noStrike">
-              <a:latin typeface="Times New Roman"/>
-            </a:endParaRPr>
-          </a:p>
-        </p:txBody>
-      </p:sp>
-      <p:sp>
-        <p:nvSpPr>
-          <p:cNvPr id="2" name="PlaceHolder 3"/>
-          <p:cNvSpPr>
-            <a:spLocks noGrp="1"/>
-          </p:cNvSpPr>
-          <p:nvPr>
-            <p:ph type="ftr" idx="2"/>
-          </p:nvPr>
-        </p:nvSpPr>
-        <p:spPr>
-          <a:xfrm>
-            <a:off x="3029040" y="4767120"/>
-            <a:ext cx="3085920" cy="273600"/>
-          </a:xfrm>
-          <a:prstGeom prst="rect">
-            <a:avLst/>
-          </a:prstGeom>
-          <a:noFill/>
-          <a:ln w="0">
-            <a:noFill/>
-          </a:ln>
-        </p:spPr>
-        <p:txBody>
-          <a:bodyPr anchor="ctr">
-            <a:noAutofit/>
-          </a:bodyPr>
-          <a:lstStyle>
-            <a:lvl1pPr algn="ctr">
               <a:buNone/>
               <a:defRPr b="0" lang="ru-RU" sz="1400" spc="-1" strike="noStrike">
                 <a:latin typeface="Times New Roman"/>
@@ -3310,15 +2947,18 @@
           </a:lstStyle>
           <a:p>
             <a:pPr algn="ctr">
+              <a:lnSpc>
+                <a:spcPct val="100000"/>
+              </a:lnSpc>
               <a:buNone/>
             </a:pPr>
             <a:r>
               <a:rPr b="0" lang="ru-RU" sz="1400" spc="-1" strike="noStrike">
                 <a:latin typeface="Times New Roman"/>
               </a:rPr>
-              <a:t>&lt;нижний колонтитул&gt;</a:t>
-            </a:r>
-            <a:endParaRPr b="0" lang="ru-RU" sz="1400" spc="-1" strike="noStrike">
+              <a:t>&lt;footer&gt;</a:t>
+            </a:r>
+            <a:endParaRPr b="0" lang="en-US" sz="1400" spc="-1" strike="noStrike">
               <a:latin typeface="Times New Roman"/>
             </a:endParaRPr>
           </a:p>
@@ -3326,29 +2966,29 @@
       </p:sp>
       <p:sp>
         <p:nvSpPr>
-          <p:cNvPr id="3" name="PlaceHolder 4"/>
-          <p:cNvSpPr>
-            <a:spLocks noGrp="1"/>
-          </p:cNvSpPr>
-          <p:nvPr>
-            <p:ph type="sldNum" idx="3"/>
+          <p:cNvPr id="2" name="PlaceHolder 3"/>
+          <p:cNvSpPr>
+            <a:spLocks noGrp="1"/>
+          </p:cNvSpPr>
+          <p:nvPr>
+            <p:ph type="sldNum" idx="2"/>
           </p:nvPr>
         </p:nvSpPr>
         <p:spPr>
           <a:xfrm>
             <a:off x="6458040" y="4767120"/>
-            <a:ext cx="2057040" cy="273600"/>
-          </a:xfrm>
-          <a:prstGeom prst="rect">
-            <a:avLst/>
-          </a:prstGeom>
-          <a:noFill/>
-          <a:ln w="0">
-            <a:noFill/>
-          </a:ln>
-        </p:spPr>
-        <p:txBody>
-          <a:bodyPr anchor="ctr">
+            <a:ext cx="2056680" cy="273240"/>
+          </a:xfrm>
+          <a:prstGeom prst="rect">
+            <a:avLst/>
+          </a:prstGeom>
+          <a:noFill/>
+          <a:ln w="0">
+            <a:noFill/>
+          </a:ln>
+        </p:spPr>
+        <p:txBody>
+          <a:bodyPr lIns="90000" rIns="90000" tIns="45000" bIns="45000" anchor="ctr">
             <a:noAutofit/>
           </a:bodyPr>
           <a:lstStyle>
@@ -3372,16 +3012,63 @@
               </a:lnSpc>
               <a:buNone/>
             </a:pPr>
-            <a:fld id="{170E31F6-4643-4DEB-9C17-DE2C6890DCE6}" type="slidenum">
+            <a:fld id="{78AF1164-F472-4BF5-948C-CA51DED5FFFE}" type="slidenum">
               <a:rPr b="0" lang="en-US" sz="900" spc="-1" strike="noStrike">
                 <a:solidFill>
                   <a:srgbClr val="8b8b8b"/>
                 </a:solidFill>
                 <a:latin typeface="Calibri"/>
               </a:rPr>
-              <a:t>&lt;номер&gt;</a:t>
+              <a:t>&lt;number&gt;</a:t>
             </a:fld>
-            <a:endParaRPr b="0" lang="ru-RU" sz="900" spc="-1" strike="noStrike">
+            <a:endParaRPr b="0" lang="en-US" sz="900" spc="-1" strike="noStrike">
+              <a:latin typeface="Times New Roman"/>
+            </a:endParaRPr>
+          </a:p>
+        </p:txBody>
+      </p:sp>
+      <p:sp>
+        <p:nvSpPr>
+          <p:cNvPr id="3" name="PlaceHolder 4"/>
+          <p:cNvSpPr>
+            <a:spLocks noGrp="1"/>
+          </p:cNvSpPr>
+          <p:nvPr>
+            <p:ph type="dt" idx="3"/>
+          </p:nvPr>
+        </p:nvSpPr>
+        <p:spPr>
+          <a:xfrm>
+            <a:off x="628560" y="4767120"/>
+            <a:ext cx="2056680" cy="273240"/>
+          </a:xfrm>
+          <a:prstGeom prst="rect">
+            <a:avLst/>
+          </a:prstGeom>
+          <a:noFill/>
+          <a:ln w="0">
+            <a:noFill/>
+          </a:ln>
+        </p:spPr>
+        <p:txBody>
+          <a:bodyPr lIns="90000" rIns="90000" tIns="45000" bIns="45000" anchor="ctr">
+            <a:noAutofit/>
+          </a:bodyPr>
+          <a:lstStyle>
+            <a:lvl1pPr>
+              <a:defRPr b="0" lang="en-US" sz="1400" spc="-1" strike="noStrike">
+                <a:latin typeface="Times New Roman"/>
+              </a:defRPr>
+            </a:lvl1pPr>
+          </a:lstStyle>
+          <a:p>
+            <a:r>
+              <a:rPr b="0" lang="en-US" sz="1400" spc="-1" strike="noStrike">
+                <a:latin typeface="Times New Roman"/>
+              </a:rPr>
+              <a:t>&lt;date/time&gt;</a:t>
+            </a:r>
+            <a:endParaRPr b="0" lang="en-US" sz="1400" spc="-1" strike="noStrike">
               <a:latin typeface="Times New Roman"/>
             </a:endParaRPr>
           </a:p>
@@ -3416,9 +3103,6 @@
           </a:bodyPr>
           <a:p>
             <a:pPr marL="432000" indent="-324000">
-              <a:lnSpc>
-                <a:spcPct val="90000"/>
-              </a:lnSpc>
               <a:spcBef>
                 <a:spcPts val="1417"/>
               </a:spcBef>
@@ -3430,26 +3114,17 @@
               <a:buChar char=""/>
             </a:pPr>
             <a:r>
-              <a:rPr b="0" lang="en-US" sz="2100" spc="-1" strike="noStrike">
-                <a:solidFill>
-                  <a:srgbClr val="000000"/>
-                </a:solidFill>
-                <a:latin typeface="Calibri"/>
-              </a:rPr>
-              <a:t>Для правки структуры щёлкните мышью</a:t>
-            </a:r>
-            <a:endParaRPr b="0" lang="en-US" sz="2100" spc="-1" strike="noStrike">
-              <a:solidFill>
-                <a:srgbClr val="000000"/>
-              </a:solidFill>
-              <a:latin typeface="Calibri"/>
+              <a:rPr b="0" lang="en-US" sz="3200" spc="-1" strike="noStrike">
+                <a:latin typeface="Arial"/>
+              </a:rPr>
+              <a:t>Click to edit the outline text format</a:t>
+            </a:r>
+            <a:endParaRPr b="0" lang="en-US" sz="3200" spc="-1" strike="noStrike">
+              <a:latin typeface="Arial"/>
             </a:endParaRPr>
           </a:p>
           <a:p>
             <a:pPr lvl="1" marL="864000" indent="-324000">
-              <a:lnSpc>
-                <a:spcPct val="90000"/>
-              </a:lnSpc>
               <a:spcBef>
                 <a:spcPts val="1134"/>
               </a:spcBef>
@@ -3461,26 +3136,17 @@
               <a:buChar char=""/>
             </a:pPr>
             <a:r>
-              <a:rPr b="0" lang="en-US" sz="1500" spc="-1" strike="noStrike">
-                <a:solidFill>
-                  <a:srgbClr val="000000"/>
-                </a:solidFill>
-                <a:latin typeface="Calibri"/>
-              </a:rPr>
-              <a:t>Второй уровень структуры</a:t>
-            </a:r>
-            <a:endParaRPr b="0" lang="en-US" sz="1500" spc="-1" strike="noStrike">
-              <a:solidFill>
-                <a:srgbClr val="000000"/>
-              </a:solidFill>
-              <a:latin typeface="Calibri"/>
+              <a:rPr b="0" lang="en-US" sz="2800" spc="-1" strike="noStrike">
+                <a:latin typeface="Arial"/>
+              </a:rPr>
+              <a:t>Second Outline Level</a:t>
+            </a:r>
+            <a:endParaRPr b="0" lang="en-US" sz="2800" spc="-1" strike="noStrike">
+              <a:latin typeface="Arial"/>
             </a:endParaRPr>
           </a:p>
           <a:p>
             <a:pPr lvl="2" marL="1296000" indent="-288000">
-              <a:lnSpc>
-                <a:spcPct val="90000"/>
-              </a:lnSpc>
               <a:spcBef>
                 <a:spcPts val="850"/>
               </a:spcBef>
@@ -3492,26 +3158,17 @@
               <a:buChar char=""/>
             </a:pPr>
             <a:r>
-              <a:rPr b="0" lang="en-US" sz="1350" spc="-1" strike="noStrike">
-                <a:solidFill>
-                  <a:srgbClr val="000000"/>
-                </a:solidFill>
-                <a:latin typeface="Calibri"/>
-              </a:rPr>
-              <a:t>Третий уровень структуры</a:t>
-            </a:r>
-            <a:endParaRPr b="0" lang="en-US" sz="1350" spc="-1" strike="noStrike">
-              <a:solidFill>
-                <a:srgbClr val="000000"/>
-              </a:solidFill>
-              <a:latin typeface="Calibri"/>
+              <a:rPr b="0" lang="en-US" sz="2400" spc="-1" strike="noStrike">
+                <a:latin typeface="Arial"/>
+              </a:rPr>
+              <a:t>Third Outline Level</a:t>
+            </a:r>
+            <a:endParaRPr b="0" lang="en-US" sz="2400" spc="-1" strike="noStrike">
+              <a:latin typeface="Arial"/>
             </a:endParaRPr>
           </a:p>
           <a:p>
             <a:pPr lvl="3" marL="1728000" indent="-216000">
-              <a:lnSpc>
-                <a:spcPct val="90000"/>
-              </a:lnSpc>
               <a:spcBef>
                 <a:spcPts val="567"/>
               </a:spcBef>
@@ -3523,26 +3180,17 @@
               <a:buChar char=""/>
             </a:pPr>
             <a:r>
-              <a:rPr b="0" lang="en-US" sz="1350" spc="-1" strike="noStrike">
-                <a:solidFill>
-                  <a:srgbClr val="000000"/>
-                </a:solidFill>
-                <a:latin typeface="Calibri"/>
-              </a:rPr>
-              <a:t>Четвёртый уровень структуры</a:t>
-            </a:r>
-            <a:endParaRPr b="0" lang="en-US" sz="1350" spc="-1" strike="noStrike">
-              <a:solidFill>
-                <a:srgbClr val="000000"/>
-              </a:solidFill>
-              <a:latin typeface="Calibri"/>
+              <a:rPr b="0" lang="en-US" sz="2000" spc="-1" strike="noStrike">
+                <a:latin typeface="Arial"/>
+              </a:rPr>
+              <a:t>Fourth Outline Level</a:t>
+            </a:r>
+            <a:endParaRPr b="0" lang="en-US" sz="2000" spc="-1" strike="noStrike">
+              <a:latin typeface="Arial"/>
             </a:endParaRPr>
           </a:p>
           <a:p>
             <a:pPr lvl="4" marL="2160000" indent="-216000">
-              <a:lnSpc>
-                <a:spcPct val="90000"/>
-              </a:lnSpc>
               <a:spcBef>
                 <a:spcPts val="283"/>
               </a:spcBef>
@@ -3555,25 +3203,16 @@
             </a:pPr>
             <a:r>
               <a:rPr b="0" lang="en-US" sz="2000" spc="-1" strike="noStrike">
-                <a:solidFill>
-                  <a:srgbClr val="000000"/>
-                </a:solidFill>
-                <a:latin typeface="Calibri"/>
-              </a:rPr>
-              <a:t>Пятый уровень структуры</a:t>
+                <a:latin typeface="Arial"/>
+              </a:rPr>
+              <a:t>Fifth Outline Level</a:t>
             </a:r>
             <a:endParaRPr b="0" lang="en-US" sz="2000" spc="-1" strike="noStrike">
-              <a:solidFill>
-                <a:srgbClr val="000000"/>
-              </a:solidFill>
-              <a:latin typeface="Calibri"/>
+              <a:latin typeface="Arial"/>
             </a:endParaRPr>
           </a:p>
           <a:p>
             <a:pPr lvl="5" marL="2592000" indent="-216000">
-              <a:lnSpc>
-                <a:spcPct val="90000"/>
-              </a:lnSpc>
               <a:spcBef>
                 <a:spcPts val="283"/>
               </a:spcBef>
@@ -3586,25 +3225,16 @@
             </a:pPr>
             <a:r>
               <a:rPr b="0" lang="en-US" sz="2000" spc="-1" strike="noStrike">
-                <a:solidFill>
-                  <a:srgbClr val="000000"/>
-                </a:solidFill>
-                <a:latin typeface="Calibri"/>
-              </a:rPr>
-              <a:t>Шестой уровень структуры</a:t>
+                <a:latin typeface="Arial"/>
+              </a:rPr>
+              <a:t>Sixth Outline Level</a:t>
             </a:r>
             <a:endParaRPr b="0" lang="en-US" sz="2000" spc="-1" strike="noStrike">
-              <a:solidFill>
-                <a:srgbClr val="000000"/>
-              </a:solidFill>
-              <a:latin typeface="Calibri"/>
+              <a:latin typeface="Arial"/>
             </a:endParaRPr>
           </a:p>
           <a:p>
             <a:pPr lvl="6" marL="3024000" indent="-216000">
-              <a:lnSpc>
-                <a:spcPct val="90000"/>
-              </a:lnSpc>
               <a:spcBef>
                 <a:spcPts val="283"/>
               </a:spcBef>
@@ -3617,18 +3247,12 @@
             </a:pPr>
             <a:r>
               <a:rPr b="0" lang="en-US" sz="2000" spc="-1" strike="noStrike">
-                <a:solidFill>
-                  <a:srgbClr val="000000"/>
-                </a:solidFill>
-                <a:latin typeface="Calibri"/>
-              </a:rPr>
-              <a:t>Седьмой уровень структуры</a:t>
+                <a:latin typeface="Arial"/>
+              </a:rPr>
+              <a:t>Seventh Outline Level</a:t>
             </a:r>
             <a:endParaRPr b="0" lang="en-US" sz="2000" spc="-1" strike="noStrike">
-              <a:solidFill>
-                <a:srgbClr val="000000"/>
-              </a:solidFill>
-              <a:latin typeface="Calibri"/>
+              <a:latin typeface="Arial"/>
             </a:endParaRPr>
           </a:p>
         </p:txBody>
@@ -3686,7 +3310,7 @@
         <p:spPr>
           <a:xfrm>
             <a:off x="186840" y="185400"/>
-            <a:ext cx="8770320" cy="4758120"/>
+            <a:ext cx="8769960" cy="4757760"/>
           </a:xfrm>
           <a:prstGeom prst="roundRect">
             <a:avLst>
@@ -3724,7 +3348,7 @@
         <p:spPr>
           <a:xfrm>
             <a:off x="460080" y="658080"/>
-            <a:ext cx="8469000" cy="3306960"/>
+            <a:ext cx="8468640" cy="3306600"/>
           </a:xfrm>
           <a:prstGeom prst="rect">
             <a:avLst/>
@@ -3761,58 +3385,7 @@
               </a:rPr>
               <a:t>TITLE</a:t>
             </a:r>
-            <a:endParaRPr b="0" lang="ru-RU" sz="5400" spc="-1" strike="noStrike">
-              <a:latin typeface="Arial"/>
-            </a:endParaRPr>
-          </a:p>
-        </p:txBody>
-      </p:sp>
-      <p:sp>
-        <p:nvSpPr>
-          <p:cNvPr id="49" name="Прямоугольник 5"/>
-          <p:cNvSpPr/>
-          <p:nvPr/>
-        </p:nvSpPr>
-        <p:spPr>
-          <a:xfrm>
-            <a:off x="460080" y="358920"/>
-            <a:ext cx="2999160" cy="269640"/>
-          </a:xfrm>
-          <a:prstGeom prst="rect">
-            <a:avLst/>
-          </a:prstGeom>
-          <a:noFill/>
-          <a:ln w="0">
-            <a:noFill/>
-          </a:ln>
-        </p:spPr>
-        <p:style>
-          <a:lnRef idx="0"/>
-          <a:fillRef idx="0"/>
-          <a:effectRef idx="0"/>
-          <a:fontRef idx="minor"/>
-        </p:style>
-        <p:txBody>
-          <a:bodyPr lIns="90000" rIns="90000" tIns="45000" bIns="45000" anchor="t">
-            <a:noAutofit/>
-          </a:bodyPr>
-          <a:p>
-            <a:pPr>
-              <a:lnSpc>
-                <a:spcPts val="1650"/>
-              </a:lnSpc>
-              <a:buNone/>
-            </a:pPr>
-            <a:r>
-              <a:rPr b="0" lang="ru-RU" sz="1400" spc="-1" strike="noStrike">
-                <a:solidFill>
-                  <a:srgbClr val="f2f2f2"/>
-                </a:solidFill>
-                <a:latin typeface="Arial"/>
-              </a:rPr>
-              <a:t>Тема:</a:t>
-            </a:r>
-            <a:endParaRPr b="0" lang="ru-RU" sz="1400" spc="-1" strike="noStrike">
+            <a:endParaRPr b="0" lang="en-US" sz="5400" spc="-1" strike="noStrike">
               <a:latin typeface="Arial"/>
             </a:endParaRPr>
           </a:p>
@@ -3857,14 +3430,14 @@
       </p:grpSpPr>
       <p:sp>
         <p:nvSpPr>
-          <p:cNvPr id="50" name="Прямоугольник со скругленными углами 3"/>
+          <p:cNvPr id="49" name="Прямоугольник со скругленными углами 3"/>
           <p:cNvSpPr/>
           <p:nvPr/>
         </p:nvSpPr>
         <p:spPr>
           <a:xfrm>
             <a:off x="3507480" y="0"/>
-            <a:ext cx="5636160" cy="5143320"/>
+            <a:ext cx="5635800" cy="5142960"/>
           </a:xfrm>
           <a:prstGeom prst="roundRect">
             <a:avLst>
@@ -3913,22 +3486,22 @@
               </a:rPr>
               <a:t>PIC</a:t>
             </a:r>
-            <a:endParaRPr b="0" lang="ru-RU" sz="1800" spc="-1" strike="noStrike">
-              <a:latin typeface="Arial"/>
-            </a:endParaRPr>
-          </a:p>
-        </p:txBody>
-      </p:sp>
-      <p:sp>
-        <p:nvSpPr>
-          <p:cNvPr id="51" name="Прямоугольник: скругленные углы 2"/>
+            <a:endParaRPr b="0" lang="en-US" sz="1800" spc="-1" strike="noStrike">
+              <a:latin typeface="Arial"/>
+            </a:endParaRPr>
+          </a:p>
+        </p:txBody>
+      </p:sp>
+      <p:sp>
+        <p:nvSpPr>
+          <p:cNvPr id="50" name="Прямоугольник: скругленные углы 2"/>
           <p:cNvSpPr/>
           <p:nvPr/>
         </p:nvSpPr>
         <p:spPr>
           <a:xfrm>
             <a:off x="3722040" y="257040"/>
-            <a:ext cx="5186160" cy="4650120"/>
+            <a:ext cx="5185800" cy="4649760"/>
           </a:xfrm>
           <a:prstGeom prst="roundRect">
             <a:avLst>
@@ -3962,14 +3535,14 @@
       </p:sp>
       <p:sp>
         <p:nvSpPr>
-          <p:cNvPr id="52" name="Овал 1"/>
+          <p:cNvPr id="51" name="Овал 1"/>
           <p:cNvSpPr/>
           <p:nvPr/>
         </p:nvSpPr>
         <p:spPr>
           <a:xfrm>
             <a:off x="4122000" y="631080"/>
-            <a:ext cx="899640" cy="899640"/>
+            <a:ext cx="899280" cy="899280"/>
           </a:xfrm>
           <a:prstGeom prst="ellipse">
             <a:avLst/>
@@ -4012,25 +3585,26 @@
                   <a:srgbClr val="ffffff"/>
                 </a:solidFill>
                 <a:latin typeface="Calibri"/>
+                <a:ea typeface="DejaVu Sans"/>
               </a:rPr>
               <a:t>01</a:t>
             </a:r>
-            <a:endParaRPr b="0" lang="ru-RU" sz="1800" spc="-1" strike="noStrike">
-              <a:latin typeface="Arial"/>
-            </a:endParaRPr>
-          </a:p>
-        </p:txBody>
-      </p:sp>
-      <p:sp>
-        <p:nvSpPr>
-          <p:cNvPr id="53" name="Овал 23"/>
+            <a:endParaRPr b="0" lang="en-US" sz="1800" spc="-1" strike="noStrike">
+              <a:latin typeface="Arial"/>
+            </a:endParaRPr>
+          </a:p>
+        </p:txBody>
+      </p:sp>
+      <p:sp>
+        <p:nvSpPr>
+          <p:cNvPr id="52" name="Овал 23"/>
           <p:cNvSpPr/>
           <p:nvPr/>
         </p:nvSpPr>
         <p:spPr>
           <a:xfrm>
             <a:off x="4122000" y="2127600"/>
-            <a:ext cx="899640" cy="887760"/>
+            <a:ext cx="899280" cy="887400"/>
           </a:xfrm>
           <a:prstGeom prst="ellipse">
             <a:avLst/>
@@ -4073,25 +3647,26 @@
                   <a:srgbClr val="ffffff"/>
                 </a:solidFill>
                 <a:latin typeface="Calibri"/>
+                <a:ea typeface="DejaVu Sans"/>
               </a:rPr>
               <a:t>02</a:t>
             </a:r>
-            <a:endParaRPr b="0" lang="ru-RU" sz="1800" spc="-1" strike="noStrike">
-              <a:latin typeface="Arial"/>
-            </a:endParaRPr>
-          </a:p>
-        </p:txBody>
-      </p:sp>
-      <p:sp>
-        <p:nvSpPr>
-          <p:cNvPr id="54" name="Овал 29"/>
+            <a:endParaRPr b="0" lang="en-US" sz="1800" spc="-1" strike="noStrike">
+              <a:latin typeface="Arial"/>
+            </a:endParaRPr>
+          </a:p>
+        </p:txBody>
+      </p:sp>
+      <p:sp>
+        <p:nvSpPr>
+          <p:cNvPr id="53" name="Овал 29"/>
           <p:cNvSpPr/>
           <p:nvPr/>
         </p:nvSpPr>
         <p:spPr>
           <a:xfrm>
             <a:off x="4122000" y="3612240"/>
-            <a:ext cx="899640" cy="899640"/>
+            <a:ext cx="899280" cy="899280"/>
           </a:xfrm>
           <a:prstGeom prst="ellipse">
             <a:avLst/>
@@ -4134,25 +3709,26 @@
                   <a:srgbClr val="ffffff"/>
                 </a:solidFill>
                 <a:latin typeface="Calibri"/>
+                <a:ea typeface="DejaVu Sans"/>
               </a:rPr>
               <a:t>03</a:t>
             </a:r>
-            <a:endParaRPr b="0" lang="ru-RU" sz="1800" spc="-1" strike="noStrike">
-              <a:latin typeface="Arial"/>
-            </a:endParaRPr>
-          </a:p>
-        </p:txBody>
-      </p:sp>
-      <p:sp>
-        <p:nvSpPr>
-          <p:cNvPr id="55" name="TextBox 10"/>
+            <a:endParaRPr b="0" lang="en-US" sz="1800" spc="-1" strike="noStrike">
+              <a:latin typeface="Arial"/>
+            </a:endParaRPr>
+          </a:p>
+        </p:txBody>
+      </p:sp>
+      <p:sp>
+        <p:nvSpPr>
+          <p:cNvPr id="54" name="TextBox 10"/>
           <p:cNvSpPr/>
           <p:nvPr/>
         </p:nvSpPr>
         <p:spPr>
           <a:xfrm>
             <a:off x="5110920" y="489600"/>
-            <a:ext cx="3579120" cy="550800"/>
+            <a:ext cx="3578760" cy="550440"/>
           </a:xfrm>
           <a:prstGeom prst="rect">
             <a:avLst/>
@@ -4199,22 +3775,22 @@
               </a:rPr>
               <a:t>1</a:t>
             </a:r>
-            <a:endParaRPr b="0" lang="ru-RU" sz="1400" spc="-1" strike="noStrike">
-              <a:latin typeface="Arial"/>
-            </a:endParaRPr>
-          </a:p>
-        </p:txBody>
-      </p:sp>
-      <p:sp>
-        <p:nvSpPr>
-          <p:cNvPr id="56" name="TextBox 10"/>
+            <a:endParaRPr b="0" lang="en-US" sz="1400" spc="-1" strike="noStrike">
+              <a:latin typeface="Arial"/>
+            </a:endParaRPr>
+          </a:p>
+        </p:txBody>
+      </p:sp>
+      <p:sp>
+        <p:nvSpPr>
+          <p:cNvPr id="55" name="TextBox 10"/>
           <p:cNvSpPr/>
           <p:nvPr/>
         </p:nvSpPr>
         <p:spPr>
           <a:xfrm>
             <a:off x="5110920" y="1025280"/>
-            <a:ext cx="3579120" cy="789840"/>
+            <a:ext cx="3578760" cy="789480"/>
           </a:xfrm>
           <a:prstGeom prst="rect">
             <a:avLst/>
@@ -4261,22 +3837,22 @@
               </a:rPr>
               <a:t>1</a:t>
             </a:r>
-            <a:endParaRPr b="0" lang="ru-RU" sz="1100" spc="-1" strike="noStrike">
-              <a:latin typeface="Arial"/>
-            </a:endParaRPr>
-          </a:p>
-        </p:txBody>
-      </p:sp>
-      <p:sp>
-        <p:nvSpPr>
-          <p:cNvPr id="57" name="TextBox 10"/>
+            <a:endParaRPr b="0" lang="en-US" sz="1100" spc="-1" strike="noStrike">
+              <a:latin typeface="Arial"/>
+            </a:endParaRPr>
+          </a:p>
+        </p:txBody>
+      </p:sp>
+      <p:sp>
+        <p:nvSpPr>
+          <p:cNvPr id="56" name="TextBox 10"/>
           <p:cNvSpPr/>
           <p:nvPr/>
         </p:nvSpPr>
         <p:spPr>
           <a:xfrm>
             <a:off x="5107320" y="1985400"/>
-            <a:ext cx="3579120" cy="550800"/>
+            <a:ext cx="3578760" cy="550440"/>
           </a:xfrm>
           <a:prstGeom prst="rect">
             <a:avLst/>
@@ -4313,22 +3889,22 @@
               </a:rPr>
               <a:t>SUBTITLE2</a:t>
             </a:r>
-            <a:endParaRPr b="0" lang="ru-RU" sz="1400" spc="-1" strike="noStrike">
-              <a:latin typeface="Arial"/>
-            </a:endParaRPr>
-          </a:p>
-        </p:txBody>
-      </p:sp>
-      <p:sp>
-        <p:nvSpPr>
-          <p:cNvPr id="58" name="TextBox 10"/>
+            <a:endParaRPr b="0" lang="en-US" sz="1400" spc="-1" strike="noStrike">
+              <a:latin typeface="Arial"/>
+            </a:endParaRPr>
+          </a:p>
+        </p:txBody>
+      </p:sp>
+      <p:sp>
+        <p:nvSpPr>
+          <p:cNvPr id="57" name="TextBox 10"/>
           <p:cNvSpPr/>
           <p:nvPr/>
         </p:nvSpPr>
         <p:spPr>
           <a:xfrm>
             <a:off x="5107320" y="2517840"/>
-            <a:ext cx="3579120" cy="843480"/>
+            <a:ext cx="3578760" cy="843120"/>
           </a:xfrm>
           <a:prstGeom prst="rect">
             <a:avLst/>
@@ -4375,22 +3951,22 @@
               </a:rPr>
               <a:t>2</a:t>
             </a:r>
-            <a:endParaRPr b="0" lang="ru-RU" sz="1100" spc="-1" strike="noStrike">
-              <a:latin typeface="Arial"/>
-            </a:endParaRPr>
-          </a:p>
-        </p:txBody>
-      </p:sp>
-      <p:sp>
-        <p:nvSpPr>
-          <p:cNvPr id="59" name="TextBox 10"/>
+            <a:endParaRPr b="0" lang="en-US" sz="1100" spc="-1" strike="noStrike">
+              <a:latin typeface="Arial"/>
+            </a:endParaRPr>
+          </a:p>
+        </p:txBody>
+      </p:sp>
+      <p:sp>
+        <p:nvSpPr>
+          <p:cNvPr id="58" name="TextBox 10"/>
           <p:cNvSpPr/>
           <p:nvPr/>
         </p:nvSpPr>
         <p:spPr>
           <a:xfrm>
             <a:off x="5107320" y="3470760"/>
-            <a:ext cx="3579120" cy="550800"/>
+            <a:ext cx="3578760" cy="550440"/>
           </a:xfrm>
           <a:prstGeom prst="rect">
             <a:avLst/>
@@ -4427,22 +4003,22 @@
               </a:rPr>
               <a:t>SUBTITLE3</a:t>
             </a:r>
-            <a:endParaRPr b="0" lang="ru-RU" sz="1400" spc="-1" strike="noStrike">
-              <a:latin typeface="Arial"/>
-            </a:endParaRPr>
-          </a:p>
-        </p:txBody>
-      </p:sp>
-      <p:sp>
-        <p:nvSpPr>
-          <p:cNvPr id="60" name="TextBox 10"/>
+            <a:endParaRPr b="0" lang="en-US" sz="1400" spc="-1" strike="noStrike">
+              <a:latin typeface="Arial"/>
+            </a:endParaRPr>
+          </a:p>
+        </p:txBody>
+      </p:sp>
+      <p:sp>
+        <p:nvSpPr>
+          <p:cNvPr id="59" name="TextBox 10"/>
           <p:cNvSpPr/>
           <p:nvPr/>
         </p:nvSpPr>
         <p:spPr>
           <a:xfrm>
             <a:off x="5107320" y="4003560"/>
-            <a:ext cx="3579120" cy="794880"/>
+            <a:ext cx="3578760" cy="794520"/>
           </a:xfrm>
           <a:prstGeom prst="rect">
             <a:avLst/>
@@ -4489,22 +4065,22 @@
               </a:rPr>
               <a:t>3</a:t>
             </a:r>
-            <a:endParaRPr b="0" lang="ru-RU" sz="1100" spc="-1" strike="noStrike">
-              <a:latin typeface="Arial"/>
-            </a:endParaRPr>
-          </a:p>
-        </p:txBody>
-      </p:sp>
-      <p:sp>
-        <p:nvSpPr>
-          <p:cNvPr id="61" name="TextBox 13"/>
+            <a:endParaRPr b="0" lang="en-US" sz="1100" spc="-1" strike="noStrike">
+              <a:latin typeface="Arial"/>
+            </a:endParaRPr>
+          </a:p>
+        </p:txBody>
+      </p:sp>
+      <p:sp>
+        <p:nvSpPr>
+          <p:cNvPr id="60" name="TextBox 13"/>
           <p:cNvSpPr/>
           <p:nvPr/>
         </p:nvSpPr>
         <p:spPr>
           <a:xfrm>
             <a:off x="165960" y="200880"/>
-            <a:ext cx="3148200" cy="1842120"/>
+            <a:ext cx="3147840" cy="1841760"/>
           </a:xfrm>
           <a:prstGeom prst="rect">
             <a:avLst/>
@@ -4537,10 +4113,11 @@
                   <a:srgbClr val="ffffff"/>
                 </a:solidFill>
                 <a:latin typeface="Arial"/>
+                <a:ea typeface="DejaVu Sans"/>
               </a:rPr>
               <a:t>TITLE</a:t>
             </a:r>
-            <a:endParaRPr b="0" lang="ru-RU" sz="2200" spc="-1" strike="noStrike">
+            <a:endParaRPr b="0" lang="en-US" sz="2200" spc="-1" strike="noStrike">
               <a:latin typeface="Arial"/>
             </a:endParaRPr>
           </a:p>
@@ -4585,14 +4162,14 @@
       </p:grpSpPr>
       <p:sp>
         <p:nvSpPr>
-          <p:cNvPr id="62" name="Прямоугольник со скругленными углами 3"/>
+          <p:cNvPr id="61" name="Прямоугольник со скругленными углами 3"/>
           <p:cNvSpPr/>
           <p:nvPr/>
         </p:nvSpPr>
         <p:spPr>
           <a:xfrm>
             <a:off x="0" y="0"/>
-            <a:ext cx="9143640" cy="1961640"/>
+            <a:ext cx="9143280" cy="1961280"/>
           </a:xfrm>
           <a:prstGeom prst="roundRect">
             <a:avLst>
@@ -4643,22 +4220,22 @@
               </a:rPr>
               <a:t>PIC</a:t>
             </a:r>
-            <a:endParaRPr b="0" lang="ru-RU" sz="1800" spc="-1" strike="noStrike">
-              <a:latin typeface="Arial"/>
-            </a:endParaRPr>
-          </a:p>
-        </p:txBody>
-      </p:sp>
-      <p:sp>
-        <p:nvSpPr>
-          <p:cNvPr id="63" name="TextBox 10"/>
+            <a:endParaRPr b="0" lang="en-US" sz="1800" spc="-1" strike="noStrike">
+              <a:latin typeface="Arial"/>
+            </a:endParaRPr>
+          </a:p>
+        </p:txBody>
+      </p:sp>
+      <p:sp>
+        <p:nvSpPr>
+          <p:cNvPr id="62" name="TextBox 10"/>
           <p:cNvSpPr/>
           <p:nvPr/>
         </p:nvSpPr>
         <p:spPr>
           <a:xfrm>
             <a:off x="384840" y="2571840"/>
-            <a:ext cx="2665080" cy="713880"/>
+            <a:ext cx="2664720" cy="713520"/>
           </a:xfrm>
           <a:prstGeom prst="rect">
             <a:avLst/>
@@ -4695,22 +4272,22 @@
               </a:rPr>
               <a:t>SUBTITLE1</a:t>
             </a:r>
-            <a:endParaRPr b="0" lang="ru-RU" sz="1400" spc="-1" strike="noStrike">
-              <a:latin typeface="Arial"/>
-            </a:endParaRPr>
-          </a:p>
-        </p:txBody>
-      </p:sp>
-      <p:sp>
-        <p:nvSpPr>
-          <p:cNvPr id="64" name="TextBox 10"/>
+            <a:endParaRPr b="0" lang="en-US" sz="1400" spc="-1" strike="noStrike">
+              <a:latin typeface="Arial"/>
+            </a:endParaRPr>
+          </a:p>
+        </p:txBody>
+      </p:sp>
+      <p:sp>
+        <p:nvSpPr>
+          <p:cNvPr id="63" name="TextBox 10"/>
           <p:cNvSpPr/>
           <p:nvPr/>
         </p:nvSpPr>
         <p:spPr>
           <a:xfrm>
             <a:off x="384840" y="3356280"/>
-            <a:ext cx="2665080" cy="1565280"/>
+            <a:ext cx="2664720" cy="1564920"/>
           </a:xfrm>
           <a:prstGeom prst="rect">
             <a:avLst/>
@@ -4757,22 +4334,22 @@
               </a:rPr>
               <a:t>1</a:t>
             </a:r>
-            <a:endParaRPr b="0" lang="ru-RU" sz="1100" spc="-1" strike="noStrike">
-              <a:latin typeface="Arial"/>
-            </a:endParaRPr>
-          </a:p>
-        </p:txBody>
-      </p:sp>
-      <p:sp>
-        <p:nvSpPr>
-          <p:cNvPr id="65" name="TextBox 10"/>
+            <a:endParaRPr b="0" lang="en-US" sz="1100" spc="-1" strike="noStrike">
+              <a:latin typeface="Arial"/>
+            </a:endParaRPr>
+          </a:p>
+        </p:txBody>
+      </p:sp>
+      <p:sp>
+        <p:nvSpPr>
+          <p:cNvPr id="64" name="TextBox 10"/>
           <p:cNvSpPr/>
           <p:nvPr/>
         </p:nvSpPr>
         <p:spPr>
           <a:xfrm>
             <a:off x="3239280" y="2571840"/>
-            <a:ext cx="2665080" cy="713880"/>
+            <a:ext cx="2664720" cy="713520"/>
           </a:xfrm>
           <a:prstGeom prst="rect">
             <a:avLst/>
@@ -4809,22 +4386,22 @@
               </a:rPr>
               <a:t>SUBTITLE2</a:t>
             </a:r>
-            <a:endParaRPr b="0" lang="ru-RU" sz="1400" spc="-1" strike="noStrike">
-              <a:latin typeface="Arial"/>
-            </a:endParaRPr>
-          </a:p>
-        </p:txBody>
-      </p:sp>
-      <p:sp>
-        <p:nvSpPr>
-          <p:cNvPr id="66" name="TextBox 10"/>
+            <a:endParaRPr b="0" lang="en-US" sz="1400" spc="-1" strike="noStrike">
+              <a:latin typeface="Arial"/>
+            </a:endParaRPr>
+          </a:p>
+        </p:txBody>
+      </p:sp>
+      <p:sp>
+        <p:nvSpPr>
+          <p:cNvPr id="65" name="TextBox 10"/>
           <p:cNvSpPr/>
           <p:nvPr/>
         </p:nvSpPr>
         <p:spPr>
           <a:xfrm>
             <a:off x="3239280" y="3356280"/>
-            <a:ext cx="2665080" cy="1565280"/>
+            <a:ext cx="2664720" cy="1564920"/>
           </a:xfrm>
           <a:prstGeom prst="rect">
             <a:avLst/>
@@ -4871,22 +4448,22 @@
               </a:rPr>
               <a:t>2</a:t>
             </a:r>
-            <a:endParaRPr b="0" lang="ru-RU" sz="1100" spc="-1" strike="noStrike">
-              <a:latin typeface="Arial"/>
-            </a:endParaRPr>
-          </a:p>
-        </p:txBody>
-      </p:sp>
-      <p:sp>
-        <p:nvSpPr>
-          <p:cNvPr id="67" name="TextBox 10"/>
+            <a:endParaRPr b="0" lang="en-US" sz="1100" spc="-1" strike="noStrike">
+              <a:latin typeface="Arial"/>
+            </a:endParaRPr>
+          </a:p>
+        </p:txBody>
+      </p:sp>
+      <p:sp>
+        <p:nvSpPr>
+          <p:cNvPr id="66" name="TextBox 10"/>
           <p:cNvSpPr/>
           <p:nvPr/>
         </p:nvSpPr>
         <p:spPr>
           <a:xfrm>
             <a:off x="6093720" y="2571840"/>
-            <a:ext cx="2665080" cy="713880"/>
+            <a:ext cx="2664720" cy="713520"/>
           </a:xfrm>
           <a:prstGeom prst="rect">
             <a:avLst/>
@@ -4923,22 +4500,22 @@
               </a:rPr>
               <a:t>SUBTITLE3</a:t>
             </a:r>
-            <a:endParaRPr b="0" lang="ru-RU" sz="1400" spc="-1" strike="noStrike">
-              <a:latin typeface="Arial"/>
-            </a:endParaRPr>
-          </a:p>
-        </p:txBody>
-      </p:sp>
-      <p:sp>
-        <p:nvSpPr>
-          <p:cNvPr id="68" name="TextBox 10"/>
+            <a:endParaRPr b="0" lang="en-US" sz="1400" spc="-1" strike="noStrike">
+              <a:latin typeface="Arial"/>
+            </a:endParaRPr>
+          </a:p>
+        </p:txBody>
+      </p:sp>
+      <p:sp>
+        <p:nvSpPr>
+          <p:cNvPr id="67" name="TextBox 10"/>
           <p:cNvSpPr/>
           <p:nvPr/>
         </p:nvSpPr>
         <p:spPr>
           <a:xfrm>
             <a:off x="6093720" y="3356280"/>
-            <a:ext cx="2665080" cy="1565280"/>
+            <a:ext cx="2664720" cy="1564920"/>
           </a:xfrm>
           <a:prstGeom prst="rect">
             <a:avLst/>
@@ -4985,22 +4562,22 @@
               </a:rPr>
               <a:t>3</a:t>
             </a:r>
-            <a:endParaRPr b="0" lang="ru-RU" sz="1100" spc="-1" strike="noStrike">
-              <a:latin typeface="Arial"/>
-            </a:endParaRPr>
-          </a:p>
-        </p:txBody>
-      </p:sp>
-      <p:sp>
-        <p:nvSpPr>
-          <p:cNvPr id="69" name="TextBox 9"/>
+            <a:endParaRPr b="0" lang="en-US" sz="1100" spc="-1" strike="noStrike">
+              <a:latin typeface="Arial"/>
+            </a:endParaRPr>
+          </a:p>
+        </p:txBody>
+      </p:sp>
+      <p:sp>
+        <p:nvSpPr>
+          <p:cNvPr id="68" name="TextBox 9"/>
           <p:cNvSpPr/>
           <p:nvPr/>
         </p:nvSpPr>
         <p:spPr>
           <a:xfrm>
             <a:off x="384840" y="2178000"/>
-            <a:ext cx="8465760" cy="480960"/>
+            <a:ext cx="8465400" cy="480600"/>
           </a:xfrm>
           <a:prstGeom prst="rect">
             <a:avLst/>
@@ -5033,10 +4610,11 @@
                   <a:srgbClr val="ffffff"/>
                 </a:solidFill>
                 <a:latin typeface="Arial"/>
+                <a:ea typeface="DejaVu Sans"/>
               </a:rPr>
               <a:t>TITLE</a:t>
             </a:r>
-            <a:endParaRPr b="0" lang="ru-RU" sz="2200" spc="-1" strike="noStrike">
+            <a:endParaRPr b="0" lang="en-US" sz="2200" spc="-1" strike="noStrike">
               <a:latin typeface="Arial"/>
             </a:endParaRPr>
           </a:p>
@@ -5081,14 +4659,14 @@
       </p:grpSpPr>
       <p:sp>
         <p:nvSpPr>
-          <p:cNvPr id="70" name="Прямоугольник: скругленные углы 15"/>
+          <p:cNvPr id="69" name="Прямоугольник: скругленные углы 15"/>
           <p:cNvSpPr/>
           <p:nvPr/>
         </p:nvSpPr>
         <p:spPr>
           <a:xfrm>
             <a:off x="4636440" y="250200"/>
-            <a:ext cx="4198320" cy="4625280"/>
+            <a:ext cx="4197960" cy="4624920"/>
           </a:xfrm>
           <a:prstGeom prst="roundRect">
             <a:avLst>
@@ -5135,25 +4713,26 @@
                   <a:srgbClr val="ffffff"/>
                 </a:solidFill>
                 <a:latin typeface="Calibri"/>
+                <a:ea typeface="DejaVu Sans"/>
               </a:rPr>
               <a:t>PIC</a:t>
             </a:r>
-            <a:endParaRPr b="0" lang="ru-RU" sz="1800" spc="-1" strike="noStrike">
-              <a:latin typeface="Arial"/>
-            </a:endParaRPr>
-          </a:p>
-        </p:txBody>
-      </p:sp>
-      <p:sp>
-        <p:nvSpPr>
-          <p:cNvPr id="71" name="Прямоугольник: скругленные углы 16"/>
+            <a:endParaRPr b="0" lang="en-US" sz="1800" spc="-1" strike="noStrike">
+              <a:latin typeface="Arial"/>
+            </a:endParaRPr>
+          </a:p>
+        </p:txBody>
+      </p:sp>
+      <p:sp>
+        <p:nvSpPr>
+          <p:cNvPr id="70" name="Прямоугольник: скругленные углы 16"/>
           <p:cNvSpPr/>
           <p:nvPr/>
         </p:nvSpPr>
         <p:spPr>
           <a:xfrm>
             <a:off x="329400" y="257040"/>
-            <a:ext cx="4198320" cy="4625280"/>
+            <a:ext cx="4197960" cy="4624920"/>
           </a:xfrm>
           <a:prstGeom prst="roundRect">
             <a:avLst>
@@ -5187,14 +4766,14 @@
       </p:sp>
       <p:sp>
         <p:nvSpPr>
-          <p:cNvPr id="72" name="Овал 9"/>
+          <p:cNvPr id="71" name="Овал 9"/>
           <p:cNvSpPr/>
           <p:nvPr/>
         </p:nvSpPr>
         <p:spPr>
           <a:xfrm>
             <a:off x="4272120" y="1193040"/>
-            <a:ext cx="635400" cy="635400"/>
+            <a:ext cx="635040" cy="635040"/>
           </a:xfrm>
           <a:prstGeom prst="ellipse">
             <a:avLst/>
@@ -5223,14 +4802,14 @@
       </p:sp>
       <p:sp>
         <p:nvSpPr>
-          <p:cNvPr id="73" name="TextBox 10"/>
+          <p:cNvPr id="72" name="TextBox 10"/>
           <p:cNvSpPr/>
           <p:nvPr/>
         </p:nvSpPr>
         <p:spPr>
           <a:xfrm>
             <a:off x="581760" y="828720"/>
-            <a:ext cx="3693600" cy="550800"/>
+            <a:ext cx="3693240" cy="550440"/>
           </a:xfrm>
           <a:prstGeom prst="rect">
             <a:avLst/>
@@ -5277,22 +4856,22 @@
               </a:rPr>
               <a:t>1</a:t>
             </a:r>
-            <a:endParaRPr b="0" lang="ru-RU" sz="1400" spc="-1" strike="noStrike">
-              <a:latin typeface="Arial"/>
-            </a:endParaRPr>
-          </a:p>
-        </p:txBody>
-      </p:sp>
-      <p:sp>
-        <p:nvSpPr>
-          <p:cNvPr id="74" name="TextBox 10"/>
+            <a:endParaRPr b="0" lang="en-US" sz="1400" spc="-1" strike="noStrike">
+              <a:latin typeface="Arial"/>
+            </a:endParaRPr>
+          </a:p>
+        </p:txBody>
+      </p:sp>
+      <p:sp>
+        <p:nvSpPr>
+          <p:cNvPr id="73" name="TextBox 10"/>
           <p:cNvSpPr/>
           <p:nvPr/>
         </p:nvSpPr>
         <p:spPr>
           <a:xfrm>
             <a:off x="581760" y="1364400"/>
-            <a:ext cx="3693600" cy="789840"/>
+            <a:ext cx="3693240" cy="789480"/>
           </a:xfrm>
           <a:prstGeom prst="rect">
             <a:avLst/>
@@ -5339,22 +4918,22 @@
               </a:rPr>
               <a:t>1</a:t>
             </a:r>
-            <a:endParaRPr b="0" lang="ru-RU" sz="1100" spc="-1" strike="noStrike">
-              <a:latin typeface="Arial"/>
-            </a:endParaRPr>
-          </a:p>
-        </p:txBody>
-      </p:sp>
-      <p:sp>
-        <p:nvSpPr>
-          <p:cNvPr id="75" name="TextBox 10"/>
+            <a:endParaRPr b="0" lang="en-US" sz="1100" spc="-1" strike="noStrike">
+              <a:latin typeface="Arial"/>
+            </a:endParaRPr>
+          </a:p>
+        </p:txBody>
+      </p:sp>
+      <p:sp>
+        <p:nvSpPr>
+          <p:cNvPr id="74" name="TextBox 10"/>
           <p:cNvSpPr/>
           <p:nvPr/>
         </p:nvSpPr>
         <p:spPr>
           <a:xfrm>
             <a:off x="578160" y="2154600"/>
-            <a:ext cx="3693600" cy="550800"/>
+            <a:ext cx="3693240" cy="550440"/>
           </a:xfrm>
           <a:prstGeom prst="rect">
             <a:avLst/>
@@ -5391,22 +4970,22 @@
               </a:rPr>
               <a:t>SUBTITLE2</a:t>
             </a:r>
-            <a:endParaRPr b="0" lang="ru-RU" sz="1400" spc="-1" strike="noStrike">
-              <a:latin typeface="Arial"/>
-            </a:endParaRPr>
-          </a:p>
-        </p:txBody>
-      </p:sp>
-      <p:sp>
-        <p:nvSpPr>
-          <p:cNvPr id="76" name="TextBox 10"/>
+            <a:endParaRPr b="0" lang="en-US" sz="1400" spc="-1" strike="noStrike">
+              <a:latin typeface="Arial"/>
+            </a:endParaRPr>
+          </a:p>
+        </p:txBody>
+      </p:sp>
+      <p:sp>
+        <p:nvSpPr>
+          <p:cNvPr id="75" name="TextBox 10"/>
           <p:cNvSpPr/>
           <p:nvPr/>
         </p:nvSpPr>
         <p:spPr>
           <a:xfrm>
             <a:off x="578160" y="2687040"/>
-            <a:ext cx="3693600" cy="843480"/>
+            <a:ext cx="3693240" cy="843120"/>
           </a:xfrm>
           <a:prstGeom prst="rect">
             <a:avLst/>
@@ -5453,22 +5032,22 @@
               </a:rPr>
               <a:t>2</a:t>
             </a:r>
-            <a:endParaRPr b="0" lang="ru-RU" sz="1100" spc="-1" strike="noStrike">
-              <a:latin typeface="Arial"/>
-            </a:endParaRPr>
-          </a:p>
-        </p:txBody>
-      </p:sp>
-      <p:sp>
-        <p:nvSpPr>
-          <p:cNvPr id="77" name="TextBox 10"/>
+            <a:endParaRPr b="0" lang="en-US" sz="1100" spc="-1" strike="noStrike">
+              <a:latin typeface="Arial"/>
+            </a:endParaRPr>
+          </a:p>
+        </p:txBody>
+      </p:sp>
+      <p:sp>
+        <p:nvSpPr>
+          <p:cNvPr id="76" name="TextBox 10"/>
           <p:cNvSpPr/>
           <p:nvPr/>
         </p:nvSpPr>
         <p:spPr>
           <a:xfrm>
             <a:off x="578160" y="3482280"/>
-            <a:ext cx="3693600" cy="550800"/>
+            <a:ext cx="3693240" cy="550440"/>
           </a:xfrm>
           <a:prstGeom prst="rect">
             <a:avLst/>
@@ -5505,22 +5084,22 @@
               </a:rPr>
               <a:t>SUBTITLE3</a:t>
             </a:r>
-            <a:endParaRPr b="0" lang="ru-RU" sz="1400" spc="-1" strike="noStrike">
-              <a:latin typeface="Arial"/>
-            </a:endParaRPr>
-          </a:p>
-        </p:txBody>
-      </p:sp>
-      <p:sp>
-        <p:nvSpPr>
-          <p:cNvPr id="78" name="TextBox 10"/>
+            <a:endParaRPr b="0" lang="en-US" sz="1400" spc="-1" strike="noStrike">
+              <a:latin typeface="Arial"/>
+            </a:endParaRPr>
+          </a:p>
+        </p:txBody>
+      </p:sp>
+      <p:sp>
+        <p:nvSpPr>
+          <p:cNvPr id="77" name="TextBox 10"/>
           <p:cNvSpPr/>
           <p:nvPr/>
         </p:nvSpPr>
         <p:spPr>
           <a:xfrm>
             <a:off x="578160" y="4015080"/>
-            <a:ext cx="3693600" cy="794880"/>
+            <a:ext cx="3693240" cy="794520"/>
           </a:xfrm>
           <a:prstGeom prst="rect">
             <a:avLst/>
@@ -5567,22 +5146,22 @@
               </a:rPr>
               <a:t>3</a:t>
             </a:r>
-            <a:endParaRPr b="0" lang="ru-RU" sz="1100" spc="-1" strike="noStrike">
-              <a:latin typeface="Arial"/>
-            </a:endParaRPr>
-          </a:p>
-        </p:txBody>
-      </p:sp>
-      <p:sp>
-        <p:nvSpPr>
-          <p:cNvPr id="79" name="TextBox 30"/>
+            <a:endParaRPr b="0" lang="en-US" sz="1100" spc="-1" strike="noStrike">
+              <a:latin typeface="Arial"/>
+            </a:endParaRPr>
+          </a:p>
+        </p:txBody>
+      </p:sp>
+      <p:sp>
+        <p:nvSpPr>
+          <p:cNvPr id="78" name="TextBox 30"/>
           <p:cNvSpPr/>
           <p:nvPr/>
         </p:nvSpPr>
         <p:spPr>
           <a:xfrm>
             <a:off x="553680" y="352440"/>
-            <a:ext cx="3803760" cy="789840"/>
+            <a:ext cx="3803400" cy="789480"/>
           </a:xfrm>
           <a:prstGeom prst="rect">
             <a:avLst/>
@@ -5615,10 +5194,11 @@
                   <a:srgbClr val="ffffff"/>
                 </a:solidFill>
                 <a:latin typeface="Arial"/>
+                <a:ea typeface="DejaVu Sans"/>
               </a:rPr>
               <a:t>TITLE</a:t>
             </a:r>
-            <a:endParaRPr b="0" lang="ru-RU" sz="2200" spc="-1" strike="noStrike">
+            <a:endParaRPr b="0" lang="en-US" sz="2200" spc="-1" strike="noStrike">
               <a:latin typeface="Arial"/>
             </a:endParaRPr>
           </a:p>
@@ -5663,14 +5243,14 @@
       </p:grpSpPr>
       <p:sp>
         <p:nvSpPr>
-          <p:cNvPr id="80" name="TextBox 20"/>
+          <p:cNvPr id="79" name="TextBox 20"/>
           <p:cNvSpPr/>
           <p:nvPr/>
         </p:nvSpPr>
         <p:spPr>
           <a:xfrm>
             <a:off x="516960" y="411840"/>
-            <a:ext cx="8465760" cy="480960"/>
+            <a:ext cx="8465400" cy="480600"/>
           </a:xfrm>
           <a:prstGeom prst="rect">
             <a:avLst/>
@@ -5703,25 +5283,26 @@
                   <a:srgbClr val="ffffff"/>
                 </a:solidFill>
                 <a:latin typeface="Arial"/>
+                <a:ea typeface="DejaVu Sans"/>
               </a:rPr>
               <a:t>TITLE</a:t>
             </a:r>
-            <a:endParaRPr b="0" lang="ru-RU" sz="2200" spc="-1" strike="noStrike">
-              <a:latin typeface="Arial"/>
-            </a:endParaRPr>
-          </a:p>
-        </p:txBody>
-      </p:sp>
-      <p:sp>
-        <p:nvSpPr>
-          <p:cNvPr id="81" name="Прямоугольник со скругленными углами 3"/>
+            <a:endParaRPr b="0" lang="en-US" sz="2200" spc="-1" strike="noStrike">
+              <a:latin typeface="Arial"/>
+            </a:endParaRPr>
+          </a:p>
+        </p:txBody>
+      </p:sp>
+      <p:sp>
+        <p:nvSpPr>
+          <p:cNvPr id="80" name="Прямоугольник со скругленными углами 3"/>
           <p:cNvSpPr/>
           <p:nvPr/>
         </p:nvSpPr>
         <p:spPr>
           <a:xfrm>
             <a:off x="456480" y="1406160"/>
-            <a:ext cx="2300760" cy="1440000"/>
+            <a:ext cx="2300400" cy="1439640"/>
           </a:xfrm>
           <a:prstGeom prst="roundRect">
             <a:avLst>
@@ -5772,22 +5353,22 @@
               </a:rPr>
               <a:t>PIC</a:t>
             </a:r>
-            <a:endParaRPr b="0" lang="ru-RU" sz="1800" spc="-1" strike="noStrike">
-              <a:latin typeface="Arial"/>
-            </a:endParaRPr>
-          </a:p>
-        </p:txBody>
-      </p:sp>
-      <p:sp>
-        <p:nvSpPr>
-          <p:cNvPr id="82" name="TextBox 10"/>
+            <a:endParaRPr b="0" lang="en-US" sz="1800" spc="-1" strike="noStrike">
+              <a:latin typeface="Arial"/>
+            </a:endParaRPr>
+          </a:p>
+        </p:txBody>
+      </p:sp>
+      <p:sp>
+        <p:nvSpPr>
+          <p:cNvPr id="81" name="TextBox 10"/>
           <p:cNvSpPr/>
           <p:nvPr/>
         </p:nvSpPr>
         <p:spPr>
           <a:xfrm>
             <a:off x="384840" y="3013560"/>
-            <a:ext cx="2429280" cy="713880"/>
+            <a:ext cx="2428920" cy="713520"/>
           </a:xfrm>
           <a:prstGeom prst="rect">
             <a:avLst/>
@@ -5824,22 +5405,22 @@
               </a:rPr>
               <a:t>SUBTITLE1</a:t>
             </a:r>
-            <a:endParaRPr b="0" lang="ru-RU" sz="1400" spc="-1" strike="noStrike">
-              <a:latin typeface="Arial"/>
-            </a:endParaRPr>
-          </a:p>
-        </p:txBody>
-      </p:sp>
-      <p:sp>
-        <p:nvSpPr>
-          <p:cNvPr id="83" name="TextBox 10"/>
+            <a:endParaRPr b="0" lang="en-US" sz="1400" spc="-1" strike="noStrike">
+              <a:latin typeface="Arial"/>
+            </a:endParaRPr>
+          </a:p>
+        </p:txBody>
+      </p:sp>
+      <p:sp>
+        <p:nvSpPr>
+          <p:cNvPr id="82" name="TextBox 10"/>
           <p:cNvSpPr/>
           <p:nvPr/>
         </p:nvSpPr>
         <p:spPr>
           <a:xfrm>
             <a:off x="384840" y="3798000"/>
-            <a:ext cx="2429280" cy="1037880"/>
+            <a:ext cx="2428920" cy="1037520"/>
           </a:xfrm>
           <a:prstGeom prst="rect">
             <a:avLst/>
@@ -5886,22 +5467,22 @@
               </a:rPr>
               <a:t>1</a:t>
             </a:r>
-            <a:endParaRPr b="0" lang="ru-RU" sz="1100" spc="-1" strike="noStrike">
-              <a:latin typeface="Arial"/>
-            </a:endParaRPr>
-          </a:p>
-        </p:txBody>
-      </p:sp>
-      <p:sp>
-        <p:nvSpPr>
-          <p:cNvPr id="84" name="Прямоугольник: скругленные углы 1"/>
+            <a:endParaRPr b="0" lang="en-US" sz="1100" spc="-1" strike="noStrike">
+              <a:latin typeface="Arial"/>
+            </a:endParaRPr>
+          </a:p>
+        </p:txBody>
+      </p:sp>
+      <p:sp>
+        <p:nvSpPr>
+          <p:cNvPr id="83" name="Прямоугольник: скругленные углы 1"/>
           <p:cNvSpPr/>
           <p:nvPr/>
         </p:nvSpPr>
         <p:spPr>
           <a:xfrm>
             <a:off x="328680" y="228600"/>
-            <a:ext cx="8501400" cy="813960"/>
+            <a:ext cx="8501040" cy="813600"/>
           </a:xfrm>
           <a:prstGeom prst="roundRect">
             <a:avLst>
@@ -5932,14 +5513,14 @@
       </p:sp>
       <p:sp>
         <p:nvSpPr>
-          <p:cNvPr id="85" name="Прямоугольник: скругленные углы 10"/>
+          <p:cNvPr id="84" name="Прямоугольник: скругленные углы 10"/>
           <p:cNvSpPr/>
           <p:nvPr/>
         </p:nvSpPr>
         <p:spPr>
           <a:xfrm>
             <a:off x="328680" y="1279080"/>
-            <a:ext cx="2557080" cy="3642840"/>
+            <a:ext cx="2556720" cy="3642480"/>
           </a:xfrm>
           <a:prstGeom prst="roundRect">
             <a:avLst>
@@ -5970,14 +5551,14 @@
       </p:sp>
       <p:sp>
         <p:nvSpPr>
-          <p:cNvPr id="86" name="Прямоугольник со скругленными углами 3"/>
+          <p:cNvPr id="85" name="Прямоугольник со скругленными углами 3"/>
           <p:cNvSpPr/>
           <p:nvPr/>
         </p:nvSpPr>
         <p:spPr>
           <a:xfrm>
             <a:off x="3421080" y="1398960"/>
-            <a:ext cx="2300760" cy="1440000"/>
+            <a:ext cx="2300400" cy="1439640"/>
           </a:xfrm>
           <a:prstGeom prst="roundRect">
             <a:avLst>
@@ -6028,22 +5609,22 @@
               </a:rPr>
               <a:t>PIC</a:t>
             </a:r>
-            <a:endParaRPr b="0" lang="ru-RU" sz="1800" spc="-1" strike="noStrike">
-              <a:latin typeface="Arial"/>
-            </a:endParaRPr>
-          </a:p>
-        </p:txBody>
-      </p:sp>
-      <p:sp>
-        <p:nvSpPr>
-          <p:cNvPr id="87" name="TextBox 10"/>
+            <a:endParaRPr b="0" lang="en-US" sz="1800" spc="-1" strike="noStrike">
+              <a:latin typeface="Arial"/>
+            </a:endParaRPr>
+          </a:p>
+        </p:txBody>
+      </p:sp>
+      <p:sp>
+        <p:nvSpPr>
+          <p:cNvPr id="86" name="TextBox 10"/>
           <p:cNvSpPr/>
           <p:nvPr/>
         </p:nvSpPr>
         <p:spPr>
           <a:xfrm>
             <a:off x="3349440" y="3013560"/>
-            <a:ext cx="2429280" cy="713880"/>
+            <a:ext cx="2428920" cy="713520"/>
           </a:xfrm>
           <a:prstGeom prst="rect">
             <a:avLst/>
@@ -6090,22 +5671,22 @@
               </a:rPr>
               <a:t>2</a:t>
             </a:r>
-            <a:endParaRPr b="0" lang="ru-RU" sz="1400" spc="-1" strike="noStrike">
-              <a:latin typeface="Arial"/>
-            </a:endParaRPr>
-          </a:p>
-        </p:txBody>
-      </p:sp>
-      <p:sp>
-        <p:nvSpPr>
-          <p:cNvPr id="88" name="TextBox 10"/>
+            <a:endParaRPr b="0" lang="en-US" sz="1400" spc="-1" strike="noStrike">
+              <a:latin typeface="Arial"/>
+            </a:endParaRPr>
+          </a:p>
+        </p:txBody>
+      </p:sp>
+      <p:sp>
+        <p:nvSpPr>
+          <p:cNvPr id="87" name="TextBox 10"/>
           <p:cNvSpPr/>
           <p:nvPr/>
         </p:nvSpPr>
         <p:spPr>
           <a:xfrm>
             <a:off x="3349440" y="3798000"/>
-            <a:ext cx="2429280" cy="1037880"/>
+            <a:ext cx="2428920" cy="1037520"/>
           </a:xfrm>
           <a:prstGeom prst="rect">
             <a:avLst/>
@@ -6152,22 +5733,22 @@
               </a:rPr>
               <a:t>2</a:t>
             </a:r>
-            <a:endParaRPr b="0" lang="ru-RU" sz="1100" spc="-1" strike="noStrike">
-              <a:latin typeface="Arial"/>
-            </a:endParaRPr>
-          </a:p>
-        </p:txBody>
-      </p:sp>
-      <p:sp>
-        <p:nvSpPr>
-          <p:cNvPr id="89" name="Прямоугольник: скругленные углы 14"/>
+            <a:endParaRPr b="0" lang="en-US" sz="1100" spc="-1" strike="noStrike">
+              <a:latin typeface="Arial"/>
+            </a:endParaRPr>
+          </a:p>
+        </p:txBody>
+      </p:sp>
+      <p:sp>
+        <p:nvSpPr>
+          <p:cNvPr id="88" name="Прямоугольник: скругленные углы 14"/>
           <p:cNvSpPr/>
           <p:nvPr/>
         </p:nvSpPr>
         <p:spPr>
           <a:xfrm>
             <a:off x="3293280" y="1271880"/>
-            <a:ext cx="2557080" cy="3642840"/>
+            <a:ext cx="2556720" cy="3642480"/>
           </a:xfrm>
           <a:prstGeom prst="roundRect">
             <a:avLst>
@@ -6198,14 +5779,14 @@
       </p:sp>
       <p:sp>
         <p:nvSpPr>
-          <p:cNvPr id="90" name="Прямоугольник со скругленными углами 3"/>
+          <p:cNvPr id="89" name="Прямоугольник со скругленными углами 3"/>
           <p:cNvSpPr/>
           <p:nvPr/>
         </p:nvSpPr>
         <p:spPr>
           <a:xfrm>
             <a:off x="6400800" y="1379520"/>
-            <a:ext cx="2300760" cy="1440000"/>
+            <a:ext cx="2300400" cy="1439640"/>
           </a:xfrm>
           <a:prstGeom prst="roundRect">
             <a:avLst>
@@ -6256,22 +5837,22 @@
               </a:rPr>
               <a:t>PIC</a:t>
             </a:r>
-            <a:endParaRPr b="0" lang="ru-RU" sz="1800" spc="-1" strike="noStrike">
-              <a:latin typeface="Arial"/>
-            </a:endParaRPr>
-          </a:p>
-        </p:txBody>
-      </p:sp>
-      <p:sp>
-        <p:nvSpPr>
-          <p:cNvPr id="91" name="TextBox 10"/>
+            <a:endParaRPr b="0" lang="en-US" sz="1800" spc="-1" strike="noStrike">
+              <a:latin typeface="Arial"/>
+            </a:endParaRPr>
+          </a:p>
+        </p:txBody>
+      </p:sp>
+      <p:sp>
+        <p:nvSpPr>
+          <p:cNvPr id="90" name="TextBox 10"/>
           <p:cNvSpPr/>
           <p:nvPr/>
         </p:nvSpPr>
         <p:spPr>
           <a:xfrm>
             <a:off x="6329520" y="3013560"/>
-            <a:ext cx="2429280" cy="713880"/>
+            <a:ext cx="2428920" cy="713520"/>
           </a:xfrm>
           <a:prstGeom prst="rect">
             <a:avLst/>
@@ -6318,22 +5899,22 @@
               </a:rPr>
               <a:t>3</a:t>
             </a:r>
-            <a:endParaRPr b="0" lang="ru-RU" sz="1400" spc="-1" strike="noStrike">
-              <a:latin typeface="Arial"/>
-            </a:endParaRPr>
-          </a:p>
-        </p:txBody>
-      </p:sp>
-      <p:sp>
-        <p:nvSpPr>
-          <p:cNvPr id="92" name="TextBox 10"/>
+            <a:endParaRPr b="0" lang="en-US" sz="1400" spc="-1" strike="noStrike">
+              <a:latin typeface="Arial"/>
+            </a:endParaRPr>
+          </a:p>
+        </p:txBody>
+      </p:sp>
+      <p:sp>
+        <p:nvSpPr>
+          <p:cNvPr id="91" name="TextBox 10"/>
           <p:cNvSpPr/>
           <p:nvPr/>
         </p:nvSpPr>
         <p:spPr>
           <a:xfrm>
             <a:off x="6329520" y="3798000"/>
-            <a:ext cx="2429280" cy="1037880"/>
+            <a:ext cx="2428920" cy="1037520"/>
           </a:xfrm>
           <a:prstGeom prst="rect">
             <a:avLst/>
@@ -6380,22 +5961,22 @@
               </a:rPr>
               <a:t>3</a:t>
             </a:r>
-            <a:endParaRPr b="0" lang="ru-RU" sz="1100" spc="-1" strike="noStrike">
-              <a:latin typeface="Arial"/>
-            </a:endParaRPr>
-          </a:p>
-        </p:txBody>
-      </p:sp>
-      <p:sp>
-        <p:nvSpPr>
-          <p:cNvPr id="93" name="Прямоугольник: скругленные углы 19"/>
+            <a:endParaRPr b="0" lang="en-US" sz="1100" spc="-1" strike="noStrike">
+              <a:latin typeface="Arial"/>
+            </a:endParaRPr>
+          </a:p>
+        </p:txBody>
+      </p:sp>
+      <p:sp>
+        <p:nvSpPr>
+          <p:cNvPr id="92" name="Прямоугольник: скругленные углы 19"/>
           <p:cNvSpPr/>
           <p:nvPr/>
         </p:nvSpPr>
         <p:spPr>
           <a:xfrm>
             <a:off x="6273000" y="1252800"/>
-            <a:ext cx="2557080" cy="3642840"/>
+            <a:ext cx="2556720" cy="3642480"/>
           </a:xfrm>
           <a:prstGeom prst="roundRect">
             <a:avLst>
@@ -6463,14 +6044,14 @@
       </p:grpSpPr>
       <p:sp>
         <p:nvSpPr>
-          <p:cNvPr id="94" name="Прямоугольник со скругленными углами 3"/>
+          <p:cNvPr id="93" name="Прямоугольник со скругленными углами 3"/>
           <p:cNvSpPr/>
           <p:nvPr/>
         </p:nvSpPr>
         <p:spPr>
           <a:xfrm>
             <a:off x="186840" y="185400"/>
-            <a:ext cx="8770320" cy="4758120"/>
+            <a:ext cx="8769960" cy="4757760"/>
           </a:xfrm>
           <a:prstGeom prst="roundRect">
             <a:avLst>
@@ -6501,14 +6082,14 @@
       </p:sp>
       <p:sp>
         <p:nvSpPr>
-          <p:cNvPr id="95" name="Прямоугольник 10"/>
+          <p:cNvPr id="94" name="Прямоугольник 10"/>
           <p:cNvSpPr/>
           <p:nvPr/>
         </p:nvSpPr>
         <p:spPr>
           <a:xfrm>
             <a:off x="460080" y="658080"/>
-            <a:ext cx="8469000" cy="3306960"/>
+            <a:ext cx="8468640" cy="3306600"/>
           </a:xfrm>
           <a:prstGeom prst="rect">
             <a:avLst/>
@@ -6545,7 +6126,7 @@
               </a:rPr>
               <a:t>TITLE</a:t>
             </a:r>
-            <a:endParaRPr b="0" lang="ru-RU" sz="5400" spc="-1" strike="noStrike">
+            <a:endParaRPr b="0" lang="en-US" sz="5400" spc="-1" strike="noStrike">
               <a:latin typeface="Arial"/>
             </a:endParaRPr>
           </a:p>
